--- a/slides/第02回_情報の表現と計算量.pptx
+++ b/slides/第02回_情報の表現と計算量.pptx
@@ -26,9 +26,11 @@
     <p:sldId id="274" r:id="rId20"/>
     <p:sldId id="275" r:id="rId21"/>
     <p:sldId id="276" r:id="rId22"/>
+    <p:sldId id="277" r:id="rId23"/>
+    <p:sldId id="278" r:id="rId24"/>
   </p:sldIdLst>
   <p:notesMasterIdLst>
-    <p:notesMasterId r:id="rId23"/>
+    <p:notesMasterId r:id="rId25"/>
   </p:notesMasterIdLst>
   <p:sldSz cx="12192000" cy="6858000"/>
   <p:notesSz cx="6858000" cy="12192000"/>
@@ -1690,6 +1692,182 @@
             <a:fld id="{F7021451-1387-4CA6-816F-3879F97B5CBC}" type="slidenum">
               <a:rPr lang="en-US"/>
               <a:t>21</a:t>
+            </a:fld>
+            <a:endParaRPr lang="en-US"/>
+          </a:p>
+        </p:txBody>
+      </p:sp>
+    </p:spTree>
+    <p:extLst>
+      <p:ext uri="{BB962C8B-B14F-4D97-AF65-F5344CB8AC3E}">
+        <p14:creationId xmlns:p14="http://schemas.microsoft.com/office/powerpoint/2010/main" val="1024086991"/>
+      </p:ext>
+    </p:extLst>
+  </p:cSld>
+  <p:clrMapOvr>
+    <a:masterClrMapping/>
+  </p:clrMapOvr>
+</p:notes>
+</file>
+
+<file path=ppt/notesSlides/notesSlide22.xml><?xml version="1.0" encoding="utf-8"?>
+<p:notes xmlns:a="http://schemas.openxmlformats.org/drawingml/2006/main" xmlns:r="http://schemas.openxmlformats.org/officeDocument/2006/relationships" xmlns:p="http://schemas.openxmlformats.org/presentationml/2006/main">
+  <p:cSld>
+    <p:spTree>
+      <p:nvGrpSpPr>
+        <p:cNvPr id="1" name=""/>
+        <p:cNvGrpSpPr/>
+        <p:nvPr/>
+      </p:nvGrpSpPr>
+      <p:grpSpPr>
+        <a:xfrm>
+          <a:off x="0" y="0"/>
+          <a:ext cx="0" cy="0"/>
+          <a:chOff x="0" y="0"/>
+          <a:chExt cx="0" cy="0"/>
+        </a:xfrm>
+      </p:grpSpPr>
+      <p:sp>
+        <p:nvSpPr>
+          <p:cNvPr id="2" name="Slide Image Placeholder 1"/>
+          <p:cNvSpPr>
+            <a:spLocks noGrp="1" noRot="1" noChangeAspect="1"/>
+          </p:cNvSpPr>
+          <p:nvPr>
+            <p:ph type="sldImg"/>
+          </p:nvPr>
+        </p:nvSpPr>
+        <p:spPr/>
+      </p:sp>
+      <p:sp>
+        <p:nvSpPr>
+          <p:cNvPr id="3" name="Notes Placeholder 2"/>
+          <p:cNvSpPr>
+            <a:spLocks noGrp="1"/>
+          </p:cNvSpPr>
+          <p:nvPr>
+            <p:ph type="body" idx="1"/>
+          </p:nvPr>
+        </p:nvSpPr>
+        <p:spPr/>
+        <p:txBody>
+          <a:bodyPr/>
+          <a:lstStyle/>
+          <a:p>
+            <a:r>
+              <a:rPr lang="en-US" dirty="0"/>
+              <a:t/>
+            </a:r>
+            <a:endParaRPr lang="en-US" dirty="0"/>
+          </a:p>
+        </p:txBody>
+      </p:sp>
+      <p:sp>
+        <p:nvSpPr>
+          <p:cNvPr id="4" name="Slide Number Placeholder 3"/>
+          <p:cNvSpPr>
+            <a:spLocks noGrp="1"/>
+          </p:cNvSpPr>
+          <p:nvPr>
+            <p:ph type="sldNum" sz="quarter" idx="10"/>
+          </p:nvPr>
+        </p:nvSpPr>
+        <p:spPr/>
+        <p:txBody>
+          <a:bodyPr/>
+          <a:lstStyle/>
+          <a:p>
+            <a:fld id="{F7021451-1387-4CA6-816F-3879F97B5CBC}" type="slidenum">
+              <a:rPr lang="en-US"/>
+              <a:t>22</a:t>
+            </a:fld>
+            <a:endParaRPr lang="en-US"/>
+          </a:p>
+        </p:txBody>
+      </p:sp>
+    </p:spTree>
+    <p:extLst>
+      <p:ext uri="{BB962C8B-B14F-4D97-AF65-F5344CB8AC3E}">
+        <p14:creationId xmlns:p14="http://schemas.microsoft.com/office/powerpoint/2010/main" val="1024086991"/>
+      </p:ext>
+    </p:extLst>
+  </p:cSld>
+  <p:clrMapOvr>
+    <a:masterClrMapping/>
+  </p:clrMapOvr>
+</p:notes>
+</file>
+
+<file path=ppt/notesSlides/notesSlide23.xml><?xml version="1.0" encoding="utf-8"?>
+<p:notes xmlns:a="http://schemas.openxmlformats.org/drawingml/2006/main" xmlns:r="http://schemas.openxmlformats.org/officeDocument/2006/relationships" xmlns:p="http://schemas.openxmlformats.org/presentationml/2006/main">
+  <p:cSld>
+    <p:spTree>
+      <p:nvGrpSpPr>
+        <p:cNvPr id="1" name=""/>
+        <p:cNvGrpSpPr/>
+        <p:nvPr/>
+      </p:nvGrpSpPr>
+      <p:grpSpPr>
+        <a:xfrm>
+          <a:off x="0" y="0"/>
+          <a:ext cx="0" cy="0"/>
+          <a:chOff x="0" y="0"/>
+          <a:chExt cx="0" cy="0"/>
+        </a:xfrm>
+      </p:grpSpPr>
+      <p:sp>
+        <p:nvSpPr>
+          <p:cNvPr id="2" name="Slide Image Placeholder 1"/>
+          <p:cNvSpPr>
+            <a:spLocks noGrp="1" noRot="1" noChangeAspect="1"/>
+          </p:cNvSpPr>
+          <p:nvPr>
+            <p:ph type="sldImg"/>
+          </p:nvPr>
+        </p:nvSpPr>
+        <p:spPr/>
+      </p:sp>
+      <p:sp>
+        <p:nvSpPr>
+          <p:cNvPr id="3" name="Notes Placeholder 2"/>
+          <p:cNvSpPr>
+            <a:spLocks noGrp="1"/>
+          </p:cNvSpPr>
+          <p:nvPr>
+            <p:ph type="body" idx="1"/>
+          </p:nvPr>
+        </p:nvSpPr>
+        <p:spPr/>
+        <p:txBody>
+          <a:bodyPr/>
+          <a:lstStyle/>
+          <a:p>
+            <a:r>
+              <a:rPr lang="en-US" dirty="0"/>
+              <a:t/>
+            </a:r>
+            <a:endParaRPr lang="en-US" dirty="0"/>
+          </a:p>
+        </p:txBody>
+      </p:sp>
+      <p:sp>
+        <p:nvSpPr>
+          <p:cNvPr id="4" name="Slide Number Placeholder 3"/>
+          <p:cNvSpPr>
+            <a:spLocks noGrp="1"/>
+          </p:cNvSpPr>
+          <p:nvPr>
+            <p:ph type="sldNum" sz="quarter" idx="10"/>
+          </p:nvPr>
+        </p:nvSpPr>
+        <p:spPr/>
+        <p:txBody>
+          <a:bodyPr/>
+          <a:lstStyle/>
+          <a:p>
+            <a:fld id="{F7021451-1387-4CA6-816F-3879F97B5CBC}" type="slidenum">
+              <a:rPr lang="en-US"/>
+              <a:t>23</a:t>
             </a:fld>
             <a:endParaRPr lang="en-US"/>
           </a:p>
@@ -3714,7 +3892,7 @@
         <p:spPr>
           <a:xfrm>
             <a:off x="685800" y="1481328"/>
-            <a:ext cx="10789920" cy="621792"/>
+            <a:ext cx="10789920" cy="365760"/>
           </a:xfrm>
           <a:prstGeom prst="rect">
             <a:avLst/>
@@ -3763,7 +3941,7 @@
         </p:blipFill>
         <p:spPr>
           <a:xfrm>
-            <a:off x="1691640" y="2139696"/>
+            <a:off x="1691640" y="1883664"/>
             <a:ext cx="8778240" cy="2840019"/>
           </a:xfrm>
           <a:prstGeom prst="rect">
@@ -3779,7 +3957,7 @@
         </p:nvSpPr>
         <p:spPr>
           <a:xfrm>
-            <a:off x="685800" y="5180883"/>
+            <a:off x="685800" y="4924851"/>
             <a:ext cx="10789920" cy="365760"/>
           </a:xfrm>
           <a:prstGeom prst="rect">
@@ -3818,7 +3996,7 @@
         </p:nvSpPr>
         <p:spPr>
           <a:xfrm>
-            <a:off x="685800" y="5564931"/>
+            <a:off x="685800" y="5308899"/>
             <a:ext cx="10789920" cy="640080"/>
           </a:xfrm>
           <a:prstGeom prst="rect">
@@ -6092,7 +6270,7 @@
         <p:spPr>
           <a:xfrm>
             <a:off x="685800" y="1481328"/>
-            <a:ext cx="10789920" cy="621792"/>
+            <a:ext cx="10789920" cy="365760"/>
           </a:xfrm>
           <a:prstGeom prst="rect">
             <a:avLst/>
@@ -6140,7 +6318,7 @@
           </p:nvPr>
         </p:nvGraphicFramePr>
         <p:xfrm>
-          <a:off x="685800" y="2139696"/>
+          <a:off x="685800" y="1883664"/>
           <a:ext cx="10789920" cy="914400"/>
         </p:xfrm>
         <a:graphic>
@@ -11950,7 +12128,7 @@
         <p:spPr>
           <a:xfrm>
             <a:off x="685800" y="1481328"/>
-            <a:ext cx="10789920" cy="621792"/>
+            <a:ext cx="10789920" cy="566928"/>
           </a:xfrm>
           <a:prstGeom prst="rect">
             <a:avLst/>
@@ -11991,7 +12169,7 @@
         </p:nvSpPr>
         <p:spPr>
           <a:xfrm>
-            <a:off x="685800" y="2139696"/>
+            <a:off x="685800" y="2084832"/>
             <a:ext cx="5280660" cy="1188720"/>
           </a:xfrm>
           <a:prstGeom prst="roundRect">
@@ -12018,7 +12196,7 @@
         </p:nvSpPr>
         <p:spPr>
           <a:xfrm>
-            <a:off x="868680" y="2276856"/>
+            <a:off x="868680" y="2221992"/>
             <a:ext cx="4914900" cy="310896"/>
           </a:xfrm>
           <a:prstGeom prst="rect">
@@ -12057,7 +12235,7 @@
         </p:nvSpPr>
         <p:spPr>
           <a:xfrm>
-            <a:off x="868680" y="2624328"/>
+            <a:off x="868680" y="2569464"/>
             <a:ext cx="4914900" cy="548640"/>
           </a:xfrm>
           <a:prstGeom prst="rect">
@@ -12099,7 +12277,7 @@
         </p:nvSpPr>
         <p:spPr>
           <a:xfrm>
-            <a:off x="6195060" y="2139696"/>
+            <a:off x="6195060" y="2084832"/>
             <a:ext cx="5280660" cy="1188720"/>
           </a:xfrm>
           <a:prstGeom prst="roundRect">
@@ -12126,7 +12304,7 @@
         </p:nvSpPr>
         <p:spPr>
           <a:xfrm>
-            <a:off x="6377940" y="2276856"/>
+            <a:off x="6377940" y="2221992"/>
             <a:ext cx="4914900" cy="310896"/>
           </a:xfrm>
           <a:prstGeom prst="rect">
@@ -12165,7 +12343,7 @@
         </p:nvSpPr>
         <p:spPr>
           <a:xfrm>
-            <a:off x="6377940" y="2624328"/>
+            <a:off x="6377940" y="2569464"/>
             <a:ext cx="4914900" cy="548640"/>
           </a:xfrm>
           <a:prstGeom prst="rect">
@@ -12207,7 +12385,7 @@
         </p:nvSpPr>
         <p:spPr>
           <a:xfrm>
-            <a:off x="685800" y="3529584"/>
+            <a:off x="685800" y="3474720"/>
             <a:ext cx="5280660" cy="1188720"/>
           </a:xfrm>
           <a:prstGeom prst="roundRect">
@@ -12234,7 +12412,7 @@
         </p:nvSpPr>
         <p:spPr>
           <a:xfrm>
-            <a:off x="868680" y="3666744"/>
+            <a:off x="868680" y="3611880"/>
             <a:ext cx="4914900" cy="310896"/>
           </a:xfrm>
           <a:prstGeom prst="rect">
@@ -12273,7 +12451,7 @@
         </p:nvSpPr>
         <p:spPr>
           <a:xfrm>
-            <a:off x="868680" y="4014216"/>
+            <a:off x="868680" y="3959352"/>
             <a:ext cx="4914900" cy="548640"/>
           </a:xfrm>
           <a:prstGeom prst="rect">
@@ -12315,7 +12493,7 @@
         </p:nvSpPr>
         <p:spPr>
           <a:xfrm>
-            <a:off x="6195060" y="3529584"/>
+            <a:off x="6195060" y="3474720"/>
             <a:ext cx="5280660" cy="1188720"/>
           </a:xfrm>
           <a:prstGeom prst="roundRect">
@@ -12342,7 +12520,7 @@
         </p:nvSpPr>
         <p:spPr>
           <a:xfrm>
-            <a:off x="6377940" y="3666744"/>
+            <a:off x="6377940" y="3611880"/>
             <a:ext cx="4914900" cy="310896"/>
           </a:xfrm>
           <a:prstGeom prst="rect">
@@ -12381,7 +12559,7 @@
         </p:nvSpPr>
         <p:spPr>
           <a:xfrm>
-            <a:off x="6377940" y="4014216"/>
+            <a:off x="6377940" y="3959352"/>
             <a:ext cx="4914900" cy="548640"/>
           </a:xfrm>
           <a:prstGeom prst="rect">
@@ -12522,7 +12700,7 @@
                 <a:ea typeface="Yu Gothic" pitchFamily="34" charset="-122"/>
                 <a:cs typeface="Yu Gothic" pitchFamily="34" charset="-120"/>
               </a:rPr>
-              <a:t>2.4　計算量</a:t>
+              <a:t>2.4　量子計算機</a:t>
             </a:r>
             <a:endParaRPr lang="en-US" sz="1200" dirty="0"/>
           </a:p>
@@ -12561,7 +12739,7 @@
                 <a:ea typeface="Yu Gothic" pitchFamily="34" charset="-122"/>
                 <a:cs typeface="Yu Gothic" pitchFamily="34" charset="-120"/>
               </a:rPr>
-              <a:t>第1回との関係</a:t>
+              <a:t>量子計算機は、この分類をどう変えるか</a:t>
             </a:r>
             <a:endParaRPr lang="en-US" sz="3000" dirty="0"/>
           </a:p>
@@ -12608,13 +12786,55 @@
       </p:sp>
       <p:sp>
         <p:nvSpPr>
-          <p:cNvPr id="5" name="Shape 3"/>
-          <p:cNvSpPr/>
-          <p:nvPr/>
-        </p:nvSpPr>
-        <p:spPr>
-          <a:xfrm>
-            <a:off x="685800" y="1527048"/>
+          <p:cNvPr id="5" name="Text 3"/>
+          <p:cNvSpPr/>
+          <p:nvPr/>
+        </p:nvSpPr>
+        <p:spPr>
+          <a:xfrm>
+            <a:off x="685800" y="1481328"/>
+            <a:ext cx="10789920" cy="566928"/>
+          </a:xfrm>
+          <a:prstGeom prst="rect">
+            <a:avLst/>
+          </a:prstGeom>
+          <a:noFill/>
+          <a:ln/>
+        </p:spPr>
+        <p:txBody>
+          <a:bodyPr wrap="square" lIns="0" tIns="0" rIns="0" bIns="0" rtlCol="0" anchor="ctr"/>
+          <a:lstStyle/>
+          <a:p>
+            <a:pPr indent="0" marL="0">
+              <a:lnSpc>
+                <a:spcPts val="2200"/>
+              </a:lnSpc>
+              <a:buNone/>
+            </a:pPr>
+            <a:r>
+              <a:rPr lang="en-US" sz="1500" dirty="0">
+                <a:solidFill>
+                  <a:srgbClr val="16191D"/>
+                </a:solidFill>
+                <a:latin typeface="Yu Gothic" pitchFamily="34" charset="0"/>
+                <a:ea typeface="Yu Gothic" pitchFamily="34" charset="-122"/>
+                <a:cs typeface="Yu Gothic" pitchFamily="34" charset="-120"/>
+              </a:rPr>
+              <a:t>第1回で「範囲は変えないが速さを変える」と述べた。計算量の言葉が揃ったので正確に言い直す。古典的な計算機で多項式時間で解けるクラスが P、量子計算機で多項式時間で解けるクラスが BQP である。</a:t>
+            </a:r>
+            <a:endParaRPr lang="en-US" sz="1500" dirty="0"/>
+          </a:p>
+        </p:txBody>
+      </p:sp>
+      <p:sp>
+        <p:nvSpPr>
+          <p:cNvPr id="6" name="Shape 4"/>
+          <p:cNvSpPr/>
+          <p:nvPr/>
+        </p:nvSpPr>
+        <p:spPr>
+          <a:xfrm>
+            <a:off x="685800" y="2130552"/>
             <a:ext cx="10789920" cy="713232"/>
           </a:xfrm>
           <a:prstGeom prst="roundRect">
@@ -12635,13 +12855,13 @@
       </p:sp>
       <p:sp>
         <p:nvSpPr>
-          <p:cNvPr id="6" name="Text 4"/>
-          <p:cNvSpPr/>
-          <p:nvPr/>
-        </p:nvSpPr>
-        <p:spPr>
-          <a:xfrm>
-            <a:off x="914400" y="1682496"/>
+          <p:cNvPr id="7" name="Text 5"/>
+          <p:cNvSpPr/>
+          <p:nvPr/>
+        </p:nvSpPr>
+        <p:spPr>
+          <a:xfrm>
+            <a:off x="914400" y="2286000"/>
             <a:ext cx="10332720" cy="402336"/>
           </a:xfrm>
           <a:prstGeom prst="rect">
@@ -12666,7 +12886,7 @@
                 <a:ea typeface="Yu Gothic" pitchFamily="34" charset="-122"/>
                 <a:cs typeface="Yu Gothic" pitchFamily="34" charset="-120"/>
               </a:rPr>
-              <a:t>計算できるか（第1回）と、現実的な時間で計算できるか（今回）は別の問い</a:t>
+              <a:t>P ⊆ BQP。量子計算機でできることは、古典的な計算機でも（遅いが）できる</a:t>
             </a:r>
             <a:endParaRPr lang="en-US" sz="1700" dirty="0"/>
           </a:p>
@@ -12674,13 +12894,13 @@
       </p:sp>
       <p:sp>
         <p:nvSpPr>
-          <p:cNvPr id="7" name="Text 5"/>
-          <p:cNvSpPr/>
-          <p:nvPr/>
-        </p:nvSpPr>
-        <p:spPr>
-          <a:xfrm>
-            <a:off x="1188720" y="2487168"/>
+          <p:cNvPr id="8" name="Text 6"/>
+          <p:cNvSpPr/>
+          <p:nvPr/>
+        </p:nvSpPr>
+        <p:spPr>
+          <a:xfrm>
+            <a:off x="1188720" y="3090672"/>
             <a:ext cx="4572000" cy="457200"/>
           </a:xfrm>
           <a:prstGeom prst="rect">
@@ -12705,7 +12925,7 @@
                 <a:ea typeface="Yu Gothic" pitchFamily="34" charset="-122"/>
                 <a:cs typeface="Yu Gothic" pitchFamily="34" charset="-120"/>
               </a:rPr>
-              <a:t>計算不可能</a:t>
+              <a:t>計算できる範囲</a:t>
             </a:r>
             <a:endParaRPr lang="en-US" sz="1500" dirty="0"/>
           </a:p>
@@ -12713,13 +12933,13 @@
       </p:sp>
       <p:sp>
         <p:nvSpPr>
-          <p:cNvPr id="8" name="Shape 6"/>
-          <p:cNvSpPr/>
-          <p:nvPr/>
-        </p:nvSpPr>
-        <p:spPr>
-          <a:xfrm>
-            <a:off x="5943600" y="2615184"/>
+          <p:cNvPr id="9" name="Shape 7"/>
+          <p:cNvSpPr/>
+          <p:nvPr/>
+        </p:nvSpPr>
+        <p:spPr>
+          <a:xfrm>
+            <a:off x="5943600" y="3218688"/>
             <a:ext cx="640080" cy="201168"/>
           </a:xfrm>
           <a:prstGeom prst="rightArrow">
@@ -12733,13 +12953,13 @@
       </p:sp>
       <p:sp>
         <p:nvSpPr>
-          <p:cNvPr id="9" name="Text 7"/>
-          <p:cNvSpPr/>
-          <p:nvPr/>
-        </p:nvSpPr>
-        <p:spPr>
-          <a:xfrm>
-            <a:off x="6766560" y="2487168"/>
+          <p:cNvPr id="10" name="Text 8"/>
+          <p:cNvSpPr/>
+          <p:nvPr/>
+        </p:nvSpPr>
+        <p:spPr>
+          <a:xfrm>
+            <a:off x="6766560" y="3090672"/>
             <a:ext cx="4206240" cy="457200"/>
           </a:xfrm>
           <a:prstGeom prst="rect">
@@ -12764,7 +12984,7 @@
                 <a:ea typeface="Yu Gothic" pitchFamily="34" charset="-122"/>
                 <a:cs typeface="Yu Gothic" pitchFamily="34" charset="-120"/>
               </a:rPr>
-              <a:t>停止問題（第1回）</a:t>
+              <a:t>変わらない</a:t>
             </a:r>
             <a:endParaRPr lang="en-US" sz="1600" dirty="0"/>
           </a:p>
@@ -12772,13 +12992,13 @@
       </p:sp>
       <p:sp>
         <p:nvSpPr>
-          <p:cNvPr id="10" name="Text 8"/>
-          <p:cNvSpPr/>
-          <p:nvPr/>
-        </p:nvSpPr>
-        <p:spPr>
-          <a:xfrm>
-            <a:off x="1188720" y="3108960"/>
+          <p:cNvPr id="11" name="Text 9"/>
+          <p:cNvSpPr/>
+          <p:nvPr/>
+        </p:nvSpPr>
+        <p:spPr>
+          <a:xfrm>
+            <a:off x="1188720" y="3712464"/>
             <a:ext cx="4572000" cy="457200"/>
           </a:xfrm>
           <a:prstGeom prst="rect">
@@ -12803,7 +13023,7 @@
                 <a:ea typeface="Yu Gothic" pitchFamily="34" charset="-122"/>
                 <a:cs typeface="Yu Gothic" pitchFamily="34" charset="-120"/>
               </a:rPr>
-              <a:t>指数時間しか知られていない</a:t>
+              <a:t>素因数分解</a:t>
             </a:r>
             <a:endParaRPr lang="en-US" sz="1500" dirty="0"/>
           </a:p>
@@ -12811,13 +13031,13 @@
       </p:sp>
       <p:sp>
         <p:nvSpPr>
-          <p:cNvPr id="11" name="Shape 9"/>
-          <p:cNvSpPr/>
-          <p:nvPr/>
-        </p:nvSpPr>
-        <p:spPr>
-          <a:xfrm>
-            <a:off x="5943600" y="3236976"/>
+          <p:cNvPr id="12" name="Shape 10"/>
+          <p:cNvSpPr/>
+          <p:nvPr/>
+        </p:nvSpPr>
+        <p:spPr>
+          <a:xfrm>
+            <a:off x="5943600" y="3840480"/>
             <a:ext cx="640080" cy="201168"/>
           </a:xfrm>
           <a:prstGeom prst="rightArrow">
@@ -12831,13 +13051,13 @@
       </p:sp>
       <p:sp>
         <p:nvSpPr>
-          <p:cNvPr id="12" name="Text 10"/>
-          <p:cNvSpPr/>
-          <p:nvPr/>
-        </p:nvSpPr>
-        <p:spPr>
-          <a:xfrm>
-            <a:off x="6766560" y="3108960"/>
+          <p:cNvPr id="13" name="Text 11"/>
+          <p:cNvSpPr/>
+          <p:nvPr/>
+        </p:nvSpPr>
+        <p:spPr>
+          <a:xfrm>
+            <a:off x="6766560" y="3712464"/>
             <a:ext cx="4206240" cy="457200"/>
           </a:xfrm>
           <a:prstGeom prst="rect">
@@ -12862,7 +13082,7 @@
                 <a:ea typeface="Yu Gothic" pitchFamily="34" charset="-122"/>
                 <a:cs typeface="Yu Gothic" pitchFamily="34" charset="-120"/>
               </a:rPr>
-              <a:t>NP完全（今回）</a:t>
+              <a:t>BQP には入る</a:t>
             </a:r>
             <a:endParaRPr lang="en-US" sz="1600" dirty="0"/>
           </a:p>
@@ -12870,111 +13090,13 @@
       </p:sp>
       <p:sp>
         <p:nvSpPr>
-          <p:cNvPr id="13" name="Text 11"/>
-          <p:cNvSpPr/>
-          <p:nvPr/>
-        </p:nvSpPr>
-        <p:spPr>
-          <a:xfrm>
-            <a:off x="1188720" y="3730752"/>
-            <a:ext cx="4572000" cy="457200"/>
-          </a:xfrm>
-          <a:prstGeom prst="rect">
-            <a:avLst/>
-          </a:prstGeom>
-          <a:noFill/>
-          <a:ln/>
-        </p:spPr>
-        <p:txBody>
-          <a:bodyPr wrap="square" lIns="0" tIns="0" rIns="0" bIns="0" rtlCol="0" anchor="ctr"/>
-          <a:lstStyle/>
-          <a:p>
-            <a:pPr algn="r" indent="0" marL="0">
-              <a:buNone/>
-            </a:pPr>
-            <a:r>
-              <a:rPr lang="en-US" sz="1500" dirty="0">
-                <a:solidFill>
-                  <a:srgbClr val="16191D"/>
-                </a:solidFill>
-                <a:latin typeface="Yu Gothic" pitchFamily="34" charset="0"/>
-                <a:ea typeface="Yu Gothic" pitchFamily="34" charset="-122"/>
-                <a:cs typeface="Yu Gothic" pitchFamily="34" charset="-120"/>
-              </a:rPr>
-              <a:t>多項式時間で解ける</a:t>
-            </a:r>
-            <a:endParaRPr lang="en-US" sz="1500" dirty="0"/>
-          </a:p>
-        </p:txBody>
-      </p:sp>
-      <p:sp>
-        <p:nvSpPr>
-          <p:cNvPr id="14" name="Shape 12"/>
-          <p:cNvSpPr/>
-          <p:nvPr/>
-        </p:nvSpPr>
-        <p:spPr>
-          <a:xfrm>
-            <a:off x="5943600" y="3858768"/>
-            <a:ext cx="640080" cy="201168"/>
-          </a:xfrm>
-          <a:prstGeom prst="rightArrow">
-            <a:avLst/>
-          </a:prstGeom>
-          <a:solidFill>
-            <a:srgbClr val="0B5CAD"/>
-          </a:solidFill>
-          <a:ln/>
-        </p:spPr>
-      </p:sp>
-      <p:sp>
-        <p:nvSpPr>
-          <p:cNvPr id="15" name="Text 13"/>
-          <p:cNvSpPr/>
-          <p:nvPr/>
-        </p:nvSpPr>
-        <p:spPr>
-          <a:xfrm>
-            <a:off x="6766560" y="3730752"/>
-            <a:ext cx="4206240" cy="457200"/>
-          </a:xfrm>
-          <a:prstGeom prst="rect">
-            <a:avLst/>
-          </a:prstGeom>
-          <a:noFill/>
-          <a:ln/>
-        </p:spPr>
-        <p:txBody>
-          <a:bodyPr wrap="square" lIns="0" tIns="0" rIns="0" bIns="0" rtlCol="0" anchor="ctr"/>
-          <a:lstStyle/>
-          <a:p>
-            <a:pPr indent="0" marL="0">
-              <a:buNone/>
-            </a:pPr>
-            <a:r>
-              <a:rPr lang="en-US" sz="1600" b="1" dirty="0">
-                <a:solidFill>
-                  <a:srgbClr val="0B5CAD"/>
-                </a:solidFill>
-                <a:latin typeface="Yu Gothic" pitchFamily="34" charset="0"/>
-                <a:ea typeface="Yu Gothic" pitchFamily="34" charset="-122"/>
-                <a:cs typeface="Yu Gothic" pitchFamily="34" charset="-120"/>
-              </a:rPr>
-              <a:t>クラス P</a:t>
-            </a:r>
-            <a:endParaRPr lang="en-US" sz="1600" dirty="0"/>
-          </a:p>
-        </p:txBody>
-      </p:sp>
-      <p:sp>
-        <p:nvSpPr>
-          <p:cNvPr id="16" name="Text 14"/>
-          <p:cNvSpPr/>
-          <p:nvPr/>
-        </p:nvSpPr>
-        <p:spPr>
-          <a:xfrm>
-            <a:off x="685800" y="4443984"/>
+          <p:cNvPr id="14" name="Text 12"/>
+          <p:cNvSpPr/>
+          <p:nvPr/>
+        </p:nvSpPr>
+        <p:spPr>
+          <a:xfrm>
+            <a:off x="685800" y="4425696"/>
             <a:ext cx="10789920" cy="457200"/>
           </a:xfrm>
           <a:prstGeom prst="rect">
@@ -13002,7 +13124,7 @@
                 <a:ea typeface="Yu Gothic" pitchFamily="34" charset="-122"/>
                 <a:cs typeface="Yu Gothic" pitchFamily="34" charset="-120"/>
               </a:rPr>
-              <a:t>この2段階の壁が、以降の講義に何度も顔を出す。第12回の公開鍵暗号は「素因数分解が P に属すると</a:t>
+              <a:t>だから第1回の「計算できる範囲は広がらない」が成り立つ。素因数分解は P に入るとは知られていないが、</a:t>
             </a:r>
             <a:endParaRPr lang="en-US" sz="1300" dirty="0"/>
           </a:p>
@@ -13022,7 +13144,49 @@
                 <a:ea typeface="Yu Gothic" pitchFamily="34" charset="-122"/>
                 <a:cs typeface="Yu Gothic" pitchFamily="34" charset="-120"/>
               </a:rPr>
-              <a:t>知られていない」ことに安全性を託しているし、第13回の機械学習は「厳密に解けない問題を近似で押し切る」道具立てである。</a:t>
+              <a:t>Shor のアルゴリズムは量子計算機でこれを多項式時間で解く。</a:t>
+            </a:r>
+            <a:endParaRPr lang="en-US" sz="1300" dirty="0"/>
+          </a:p>
+        </p:txBody>
+      </p:sp>
+      <p:sp>
+        <p:nvSpPr>
+          <p:cNvPr id="15" name="Text 13"/>
+          <p:cNvSpPr/>
+          <p:nvPr/>
+        </p:nvSpPr>
+        <p:spPr>
+          <a:xfrm>
+            <a:off x="685800" y="5852160"/>
+            <a:ext cx="10789920" cy="512064"/>
+          </a:xfrm>
+          <a:prstGeom prst="rect">
+            <a:avLst/>
+          </a:prstGeom>
+          <a:noFill/>
+          <a:ln/>
+        </p:spPr>
+        <p:txBody>
+          <a:bodyPr wrap="square" lIns="0" tIns="0" rIns="0" bIns="0" rtlCol="0" anchor="ctr"/>
+          <a:lstStyle/>
+          <a:p>
+            <a:pPr indent="0" marL="0">
+              <a:lnSpc>
+                <a:spcPts val="1900"/>
+              </a:lnSpc>
+              <a:buNone/>
+            </a:pPr>
+            <a:r>
+              <a:rPr lang="en-US" sz="1300" b="1" dirty="0">
+                <a:solidFill>
+                  <a:srgbClr val="0B5CAD"/>
+                </a:solidFill>
+                <a:latin typeface="Yu Gothic" pitchFamily="34" charset="0"/>
+                <a:ea typeface="Yu Gothic" pitchFamily="34" charset="-122"/>
+                <a:cs typeface="Yu Gothic" pitchFamily="34" charset="-120"/>
+              </a:rPr>
+              <a:t>ここが最も誤解されるところである ——「量子計算機があれば NP完全問題も解ける」は誤りである。</a:t>
             </a:r>
             <a:endParaRPr lang="en-US" sz="1300" dirty="0"/>
           </a:p>
@@ -14046,7 +14210,7 @@
                 <a:ea typeface="Yu Gothic" pitchFamily="34" charset="-122"/>
                 <a:cs typeface="Yu Gothic" pitchFamily="34" charset="-120"/>
               </a:rPr>
-              <a:t>第2回</a:t>
+              <a:t>2.4　量子計算機</a:t>
             </a:r>
             <a:endParaRPr lang="en-US" sz="1200" dirty="0"/>
           </a:p>
@@ -14085,7 +14249,7 @@
                 <a:ea typeface="Yu Gothic" pitchFamily="34" charset="-122"/>
                 <a:cs typeface="Yu Gothic" pitchFamily="34" charset="-120"/>
               </a:rPr>
-              <a:t>演習</a:t>
+              <a:t>NP完全は、量子計算機でも解けない</a:t>
             </a:r>
             <a:endParaRPr lang="en-US" sz="3000" dirty="0"/>
           </a:p>
@@ -14132,41 +14296,14 @@
       </p:sp>
       <p:sp>
         <p:nvSpPr>
-          <p:cNvPr id="5" name="Shape 3"/>
-          <p:cNvSpPr/>
-          <p:nvPr/>
-        </p:nvSpPr>
-        <p:spPr>
-          <a:xfrm>
-            <a:off x="685800" y="1691640"/>
-            <a:ext cx="868680" cy="402336"/>
-          </a:xfrm>
-          <a:prstGeom prst="roundRect">
-            <a:avLst>
-              <a:gd name="adj" fmla="val 18182"/>
-            </a:avLst>
-          </a:prstGeom>
-          <a:solidFill>
-            <a:srgbClr val="D9E6F4"/>
-          </a:solidFill>
-          <a:ln w="12700">
-            <a:solidFill>
-              <a:srgbClr val="0B5CAD"/>
-            </a:solidFill>
-            <a:prstDash val="solid"/>
-          </a:ln>
-        </p:spPr>
-      </p:sp>
-      <p:sp>
-        <p:nvSpPr>
-          <p:cNvPr id="6" name="Text 4"/>
-          <p:cNvSpPr/>
-          <p:nvPr/>
-        </p:nvSpPr>
-        <p:spPr>
-          <a:xfrm>
-            <a:off x="685800" y="1691640"/>
-            <a:ext cx="868680" cy="402336"/>
+          <p:cNvPr id="5" name="Text 3"/>
+          <p:cNvSpPr/>
+          <p:nvPr/>
+        </p:nvSpPr>
+        <p:spPr>
+          <a:xfrm>
+            <a:off x="685800" y="1481328"/>
+            <a:ext cx="10789920" cy="566928"/>
           </a:xfrm>
           <a:prstGeom prst="rect">
             <a:avLst/>
@@ -14178,53 +14315,14 @@
           <a:bodyPr wrap="square" lIns="0" tIns="0" rIns="0" bIns="0" rtlCol="0" anchor="ctr"/>
           <a:lstStyle/>
           <a:p>
-            <a:pPr algn="ctr" indent="0" marL="0">
-              <a:buNone/>
-            </a:pPr>
-            <a:r>
-              <a:rPr lang="en-US" sz="1300" b="1" dirty="0">
-                <a:solidFill>
-                  <a:srgbClr val="0B5CAD"/>
-                </a:solidFill>
-                <a:latin typeface="Courier New" pitchFamily="34" charset="0"/>
-                <a:ea typeface="Courier New" pitchFamily="34" charset="-122"/>
-                <a:cs typeface="Courier New" pitchFamily="34" charset="-120"/>
-              </a:rPr>
-              <a:t>2-1</a:t>
-            </a:r>
-            <a:endParaRPr lang="en-US" sz="1300" dirty="0"/>
-          </a:p>
-        </p:txBody>
-      </p:sp>
-      <p:sp>
-        <p:nvSpPr>
-          <p:cNvPr id="7" name="Text 5"/>
-          <p:cNvSpPr/>
-          <p:nvPr/>
-        </p:nvSpPr>
-        <p:spPr>
-          <a:xfrm>
-            <a:off x="1783080" y="1673352"/>
-            <a:ext cx="9692640" cy="932688"/>
-          </a:xfrm>
-          <a:prstGeom prst="rect">
-            <a:avLst/>
-          </a:prstGeom>
-          <a:noFill/>
-          <a:ln/>
-        </p:spPr>
-        <p:txBody>
-          <a:bodyPr wrap="square" lIns="0" tIns="0" rIns="0" bIns="0" rtlCol="0" anchor="t"/>
-          <a:lstStyle/>
-          <a:p>
             <a:pPr indent="0" marL="0">
               <a:lnSpc>
-                <a:spcPts val="2100"/>
+                <a:spcPts val="2200"/>
               </a:lnSpc>
               <a:buNone/>
             </a:pPr>
             <a:r>
-              <a:rPr lang="en-US" sz="1400" dirty="0">
+              <a:rPr lang="en-US" sz="1500" dirty="0">
                 <a:solidFill>
                   <a:srgbClr val="16191D"/>
                 </a:solidFill>
@@ -14232,49 +14330,22 @@
                 <a:ea typeface="Yu Gothic" pitchFamily="34" charset="-122"/>
                 <a:cs typeface="Yu Gothic" pitchFamily="34" charset="-120"/>
               </a:rPr>
-              <a:t>10進数 173 を8ビットの2進数で表せ。また、8ビットの2の補数表現で −45 を表せ。</a:t>
-            </a:r>
-            <a:endParaRPr lang="en-US" sz="1400" dirty="0"/>
-          </a:p>
-        </p:txBody>
-      </p:sp>
-      <p:sp>
-        <p:nvSpPr>
-          <p:cNvPr id="8" name="Shape 6"/>
-          <p:cNvSpPr/>
-          <p:nvPr/>
-        </p:nvSpPr>
-        <p:spPr>
-          <a:xfrm>
-            <a:off x="685800" y="2770632"/>
-            <a:ext cx="868680" cy="402336"/>
-          </a:xfrm>
-          <a:prstGeom prst="roundRect">
-            <a:avLst>
-              <a:gd name="adj" fmla="val 18182"/>
-            </a:avLst>
-          </a:prstGeom>
-          <a:solidFill>
-            <a:srgbClr val="D9E6F4"/>
-          </a:solidFill>
-          <a:ln w="12700">
-            <a:solidFill>
-              <a:srgbClr val="0B5CAD"/>
-            </a:solidFill>
-            <a:prstDash val="solid"/>
-          </a:ln>
-        </p:spPr>
-      </p:sp>
-      <p:sp>
-        <p:nvSpPr>
-          <p:cNvPr id="9" name="Text 7"/>
-          <p:cNvSpPr/>
-          <p:nvPr/>
-        </p:nvSpPr>
-        <p:spPr>
-          <a:xfrm>
-            <a:off x="685800" y="2770632"/>
-            <a:ext cx="868680" cy="402336"/>
+              <a:t>しらみつぶし探索を速くする Grover のアルゴリズムは、n 通りの探索を √n 回に減らす。しかし指数時間の問題では n が 2ᵏ である。</a:t>
+            </a:r>
+            <a:endParaRPr lang="en-US" sz="1500" dirty="0"/>
+          </a:p>
+        </p:txBody>
+      </p:sp>
+      <p:sp>
+        <p:nvSpPr>
+          <p:cNvPr id="6" name="Text 4"/>
+          <p:cNvSpPr/>
+          <p:nvPr/>
+        </p:nvSpPr>
+        <p:spPr>
+          <a:xfrm>
+            <a:off x="685800" y="2084832"/>
+            <a:ext cx="5166360" cy="292608"/>
           </a:xfrm>
           <a:prstGeom prst="rect">
             <a:avLst/>
@@ -14286,53 +14357,11 @@
           <a:bodyPr wrap="square" lIns="0" tIns="0" rIns="0" bIns="0" rtlCol="0" anchor="ctr"/>
           <a:lstStyle/>
           <a:p>
-            <a:pPr algn="ctr" indent="0" marL="0">
+            <a:pPr indent="0" marL="0">
               <a:buNone/>
             </a:pPr>
             <a:r>
-              <a:rPr lang="en-US" sz="1300" b="1" dirty="0">
-                <a:solidFill>
-                  <a:srgbClr val="0B5CAD"/>
-                </a:solidFill>
-                <a:latin typeface="Courier New" pitchFamily="34" charset="0"/>
-                <a:ea typeface="Courier New" pitchFamily="34" charset="-122"/>
-                <a:cs typeface="Courier New" pitchFamily="34" charset="-120"/>
-              </a:rPr>
-              <a:t>2-2</a:t>
-            </a:r>
-            <a:endParaRPr lang="en-US" sz="1300" dirty="0"/>
-          </a:p>
-        </p:txBody>
-      </p:sp>
-      <p:sp>
-        <p:nvSpPr>
-          <p:cNvPr id="10" name="Text 8"/>
-          <p:cNvSpPr/>
-          <p:nvPr/>
-        </p:nvSpPr>
-        <p:spPr>
-          <a:xfrm>
-            <a:off x="1783080" y="2752344"/>
-            <a:ext cx="9692640" cy="932688"/>
-          </a:xfrm>
-          <a:prstGeom prst="rect">
-            <a:avLst/>
-          </a:prstGeom>
-          <a:noFill/>
-          <a:ln/>
-        </p:spPr>
-        <p:txBody>
-          <a:bodyPr wrap="square" lIns="0" tIns="0" rIns="0" bIns="0" rtlCol="0" anchor="t"/>
-          <a:lstStyle/>
-          <a:p>
-            <a:pPr indent="0" marL="0">
-              <a:lnSpc>
-                <a:spcPts val="2100"/>
-              </a:lnSpc>
-              <a:buNone/>
-            </a:pPr>
-            <a:r>
-              <a:rPr lang="en-US" sz="1400" dirty="0">
+              <a:rPr lang="en-US" sz="1500" b="1" dirty="0">
                 <a:solidFill>
                   <a:srgbClr val="16191D"/>
                 </a:solidFill>
@@ -14340,34 +14369,34 @@
                 <a:ea typeface="Yu Gothic" pitchFamily="34" charset="-122"/>
                 <a:cs typeface="Yu Gothic" pitchFamily="34" charset="-120"/>
               </a:rPr>
-              <a:t>2TB と表示されたSSDを買った。OS が 2⁴⁰ を1TBとして表示する場合、何TBと表示されるか。</a:t>
-            </a:r>
-            <a:endParaRPr lang="en-US" sz="1400" dirty="0"/>
-          </a:p>
-        </p:txBody>
-      </p:sp>
-      <p:sp>
-        <p:nvSpPr>
-          <p:cNvPr id="11" name="Shape 9"/>
-          <p:cNvSpPr/>
-          <p:nvPr/>
-        </p:nvSpPr>
-        <p:spPr>
-          <a:xfrm>
-            <a:off x="685800" y="3849624"/>
-            <a:ext cx="868680" cy="402336"/>
+              <a:t>加速の程度</a:t>
+            </a:r>
+            <a:endParaRPr lang="en-US" sz="1500" dirty="0"/>
+          </a:p>
+        </p:txBody>
+      </p:sp>
+      <p:sp>
+        <p:nvSpPr>
+          <p:cNvPr id="7" name="Shape 5"/>
+          <p:cNvSpPr/>
+          <p:nvPr/>
+        </p:nvSpPr>
+        <p:spPr>
+          <a:xfrm>
+            <a:off x="685800" y="2487168"/>
+            <a:ext cx="5166360" cy="1645920"/>
           </a:xfrm>
           <a:prstGeom prst="roundRect">
             <a:avLst>
-              <a:gd name="adj" fmla="val 18182"/>
+              <a:gd name="adj" fmla="val 2222"/>
             </a:avLst>
           </a:prstGeom>
           <a:solidFill>
-            <a:srgbClr val="D9E6F4"/>
+            <a:srgbClr val="F5F7FA"/>
           </a:solidFill>
           <a:ln w="12700">
             <a:solidFill>
-              <a:srgbClr val="0B5CAD"/>
+              <a:srgbClr val="DDE4EC"/>
             </a:solidFill>
             <a:prstDash val="solid"/>
           </a:ln>
@@ -14375,14 +14404,14 @@
       </p:sp>
       <p:sp>
         <p:nvSpPr>
-          <p:cNvPr id="12" name="Text 10"/>
-          <p:cNvSpPr/>
-          <p:nvPr/>
-        </p:nvSpPr>
-        <p:spPr>
-          <a:xfrm>
-            <a:off x="685800" y="3849624"/>
-            <a:ext cx="868680" cy="402336"/>
+          <p:cNvPr id="8" name="Text 6"/>
+          <p:cNvSpPr/>
+          <p:nvPr/>
+        </p:nvSpPr>
+        <p:spPr>
+          <a:xfrm>
+            <a:off x="886968" y="2633472"/>
+            <a:ext cx="4764024" cy="1353312"/>
           </a:xfrm>
           <a:prstGeom prst="rect">
             <a:avLst/>
@@ -14391,56 +14420,153 @@
           <a:ln/>
         </p:spPr>
         <p:txBody>
-          <a:bodyPr wrap="square" lIns="0" tIns="0" rIns="0" bIns="0" rtlCol="0" anchor="ctr"/>
-          <a:lstStyle/>
-          <a:p>
-            <a:pPr algn="ctr" indent="0" marL="0">
+          <a:bodyPr wrap="square" lIns="0" tIns="0" rIns="0" bIns="0" rtlCol="0" anchor="t"/>
+          <a:lstStyle/>
+          <a:p>
+            <a:pPr indent="0" marL="0">
+              <a:lnSpc>
+                <a:spcPts val="1800"/>
+              </a:lnSpc>
               <a:buNone/>
             </a:pPr>
             <a:r>
-              <a:rPr lang="en-US" sz="1300" b="1" dirty="0">
+              <a:rPr lang="en-US" sz="1200" dirty="0">
                 <a:solidFill>
-                  <a:srgbClr val="0B5CAD"/>
+                  <a:srgbClr val="16191D"/>
                 </a:solidFill>
                 <a:latin typeface="Courier New" pitchFamily="34" charset="0"/>
                 <a:ea typeface="Courier New" pitchFamily="34" charset="-122"/>
                 <a:cs typeface="Courier New" pitchFamily="34" charset="-120"/>
               </a:rPr>
-              <a:t>2-3</a:t>
-            </a:r>
-            <a:endParaRPr lang="en-US" sz="1300" dirty="0"/>
-          </a:p>
-        </p:txBody>
-      </p:sp>
-      <p:sp>
-        <p:nvSpPr>
-          <p:cNvPr id="13" name="Text 11"/>
-          <p:cNvSpPr/>
-          <p:nvPr/>
-        </p:nvSpPr>
-        <p:spPr>
-          <a:xfrm>
-            <a:off x="1783080" y="3831336"/>
-            <a:ext cx="9692640" cy="932688"/>
-          </a:xfrm>
-          <a:prstGeom prst="rect">
-            <a:avLst/>
-          </a:prstGeom>
-          <a:noFill/>
-          <a:ln/>
-        </p:spPr>
-        <p:txBody>
-          <a:bodyPr wrap="square" lIns="0" tIns="0" rIns="0" bIns="0" rtlCol="0" anchor="t"/>
-          <a:lstStyle/>
+              <a:t>探索の手数    n    →  √n</a:t>
+            </a:r>
+            <a:endParaRPr lang="en-US" sz="1200" dirty="0"/>
+          </a:p>
           <a:p>
             <a:pPr indent="0" marL="0">
               <a:lnSpc>
-                <a:spcPts val="2100"/>
+                <a:spcPts val="1800"/>
               </a:lnSpc>
               <a:buNone/>
             </a:pPr>
-            <a:r>
-              <a:rPr lang="en-US" sz="1400" dirty="0">
+            <a:endParaRPr lang="en-US" sz="1200" dirty="0"/>
+          </a:p>
+          <a:p>
+            <a:pPr indent="0" marL="0">
+              <a:lnSpc>
+                <a:spcPts val="1800"/>
+              </a:lnSpc>
+              <a:buNone/>
+            </a:pPr>
+            <a:r>
+              <a:rPr lang="en-US" sz="1200" dirty="0">
+                <a:solidFill>
+                  <a:srgbClr val="16191D"/>
+                </a:solidFill>
+                <a:latin typeface="Courier New" pitchFamily="34" charset="0"/>
+                <a:ea typeface="Courier New" pitchFamily="34" charset="-122"/>
+                <a:cs typeface="Courier New" pitchFamily="34" charset="-120"/>
+              </a:rPr>
+              <a:t>指数時間なら  2^k  →  2^(k/2)</a:t>
+            </a:r>
+            <a:endParaRPr lang="en-US" sz="1200" dirty="0"/>
+          </a:p>
+          <a:p>
+            <a:pPr indent="0" marL="0">
+              <a:lnSpc>
+                <a:spcPts val="1800"/>
+              </a:lnSpc>
+              <a:buNone/>
+            </a:pPr>
+            <a:endParaRPr lang="en-US" sz="1200" dirty="0"/>
+          </a:p>
+          <a:p>
+            <a:pPr indent="0" marL="0">
+              <a:lnSpc>
+                <a:spcPts val="1800"/>
+              </a:lnSpc>
+              <a:buNone/>
+            </a:pPr>
+            <a:r>
+              <a:rPr lang="en-US" sz="1200" dirty="0">
+                <a:solidFill>
+                  <a:srgbClr val="16191D"/>
+                </a:solidFill>
+                <a:latin typeface="Courier New" pitchFamily="34" charset="0"/>
+                <a:ea typeface="Courier New" pitchFamily="34" charset="-122"/>
+                <a:cs typeface="Courier New" pitchFamily="34" charset="-120"/>
+              </a:rPr>
+              <a:t>              指数時間のまま</a:t>
+            </a:r>
+            <a:endParaRPr lang="en-US" sz="1200" dirty="0"/>
+          </a:p>
+        </p:txBody>
+      </p:sp>
+      <p:sp>
+        <p:nvSpPr>
+          <p:cNvPr id="9" name="Text 7"/>
+          <p:cNvSpPr/>
+          <p:nvPr/>
+        </p:nvSpPr>
+        <p:spPr>
+          <a:xfrm>
+            <a:off x="685800" y="4453128"/>
+            <a:ext cx="5166360" cy="320040"/>
+          </a:xfrm>
+          <a:prstGeom prst="rect">
+            <a:avLst/>
+          </a:prstGeom>
+          <a:noFill/>
+          <a:ln/>
+        </p:spPr>
+        <p:txBody>
+          <a:bodyPr wrap="square" lIns="0" tIns="0" rIns="0" bIns="0" rtlCol="0" anchor="ctr"/>
+          <a:lstStyle/>
+          <a:p>
+            <a:pPr indent="0" marL="0">
+              <a:buNone/>
+            </a:pPr>
+            <a:r>
+              <a:rPr lang="en-US" sz="1300" b="1" dirty="0">
+                <a:solidFill>
+                  <a:srgbClr val="0B5CAD"/>
+                </a:solidFill>
+                <a:latin typeface="Yu Gothic" pitchFamily="34" charset="0"/>
+                <a:ea typeface="Yu Gothic" pitchFamily="34" charset="-122"/>
+                <a:cs typeface="Yu Gothic" pitchFamily="34" charset="-120"/>
+              </a:rPr>
+              <a:t>鍵を1ビット伸ばせば元の強度に戻る</a:t>
+            </a:r>
+            <a:endParaRPr lang="en-US" sz="1300" dirty="0"/>
+          </a:p>
+        </p:txBody>
+      </p:sp>
+      <p:sp>
+        <p:nvSpPr>
+          <p:cNvPr id="10" name="Text 8"/>
+          <p:cNvSpPr/>
+          <p:nvPr/>
+        </p:nvSpPr>
+        <p:spPr>
+          <a:xfrm>
+            <a:off x="6309360" y="2084832"/>
+            <a:ext cx="5166360" cy="292608"/>
+          </a:xfrm>
+          <a:prstGeom prst="rect">
+            <a:avLst/>
+          </a:prstGeom>
+          <a:noFill/>
+          <a:ln/>
+        </p:spPr>
+        <p:txBody>
+          <a:bodyPr wrap="square" lIns="0" tIns="0" rIns="0" bIns="0" rtlCol="0" anchor="ctr"/>
+          <a:lstStyle/>
+          <a:p>
+            <a:pPr indent="0" marL="0">
+              <a:buNone/>
+            </a:pPr>
+            <a:r>
+              <a:rPr lang="en-US" sz="1500" b="1" dirty="0">
                 <a:solidFill>
                   <a:srgbClr val="16191D"/>
                 </a:solidFill>
@@ -14448,49 +14574,22 @@
                 <a:ea typeface="Yu Gothic" pitchFamily="34" charset="-122"/>
                 <a:cs typeface="Yu Gothic" pitchFamily="34" charset="-120"/>
               </a:rPr>
-              <a:t>ある処理が n=1,000 のとき 1秒かかった。O(n²) だとすると n=10,000 では何秒か。O(n log n) ならどうか。</a:t>
-            </a:r>
-            <a:endParaRPr lang="en-US" sz="1400" dirty="0"/>
-          </a:p>
-        </p:txBody>
-      </p:sp>
-      <p:sp>
-        <p:nvSpPr>
-          <p:cNvPr id="14" name="Shape 12"/>
-          <p:cNvSpPr/>
-          <p:nvPr/>
-        </p:nvSpPr>
-        <p:spPr>
-          <a:xfrm>
-            <a:off x="685800" y="4928616"/>
-            <a:ext cx="868680" cy="402336"/>
-          </a:xfrm>
-          <a:prstGeom prst="roundRect">
-            <a:avLst>
-              <a:gd name="adj" fmla="val 18182"/>
-            </a:avLst>
-          </a:prstGeom>
-          <a:solidFill>
-            <a:srgbClr val="D9E6F4"/>
-          </a:solidFill>
-          <a:ln w="12700">
-            <a:solidFill>
-              <a:srgbClr val="0B5CAD"/>
-            </a:solidFill>
-            <a:prstDash val="solid"/>
-          </a:ln>
-        </p:spPr>
-      </p:sp>
-      <p:sp>
-        <p:nvSpPr>
-          <p:cNvPr id="15" name="Text 13"/>
-          <p:cNvSpPr/>
-          <p:nvPr/>
-        </p:nvSpPr>
-        <p:spPr>
-          <a:xfrm>
-            <a:off x="685800" y="4928616"/>
-            <a:ext cx="868680" cy="402336"/>
+              <a:t>では Shor はなぜ効くのか</a:t>
+            </a:r>
+            <a:endParaRPr lang="en-US" sz="1500" dirty="0"/>
+          </a:p>
+        </p:txBody>
+      </p:sp>
+      <p:sp>
+        <p:nvSpPr>
+          <p:cNvPr id="11" name="Text 9"/>
+          <p:cNvSpPr/>
+          <p:nvPr/>
+        </p:nvSpPr>
+        <p:spPr>
+          <a:xfrm>
+            <a:off x="6309360" y="2487168"/>
+            <a:ext cx="5166360" cy="1554480"/>
           </a:xfrm>
           <a:prstGeom prst="rect">
             <a:avLst/>
@@ -14499,66 +14598,108 @@
           <a:ln/>
         </p:spPr>
         <p:txBody>
-          <a:bodyPr wrap="square" lIns="0" tIns="0" rIns="0" bIns="0" rtlCol="0" anchor="ctr"/>
-          <a:lstStyle/>
-          <a:p>
-            <a:pPr algn="ctr" indent="0" marL="0">
-              <a:buNone/>
-            </a:pPr>
-            <a:r>
-              <a:rPr lang="en-US" sz="1300" b="1" dirty="0">
-                <a:solidFill>
-                  <a:srgbClr val="0B5CAD"/>
-                </a:solidFill>
-                <a:latin typeface="Courier New" pitchFamily="34" charset="0"/>
-                <a:ea typeface="Courier New" pitchFamily="34" charset="-122"/>
-                <a:cs typeface="Courier New" pitchFamily="34" charset="-120"/>
-              </a:rPr>
-              <a:t>2-4</a:t>
-            </a:r>
-            <a:endParaRPr lang="en-US" sz="1300" dirty="0"/>
-          </a:p>
-        </p:txBody>
-      </p:sp>
-      <p:sp>
-        <p:nvSpPr>
-          <p:cNvPr id="16" name="Text 14"/>
-          <p:cNvSpPr/>
-          <p:nvPr/>
-        </p:nvSpPr>
-        <p:spPr>
-          <a:xfrm>
-            <a:off x="1783080" y="4910328"/>
-            <a:ext cx="9692640" cy="932688"/>
-          </a:xfrm>
-          <a:prstGeom prst="rect">
-            <a:avLst/>
-          </a:prstGeom>
-          <a:noFill/>
-          <a:ln/>
-        </p:spPr>
-        <p:txBody>
           <a:bodyPr wrap="square" lIns="0" tIns="0" rIns="0" bIns="0" rtlCol="0" anchor="t"/>
           <a:lstStyle/>
           <a:p>
             <a:pPr indent="0" marL="0">
               <a:lnSpc>
-                <a:spcPts val="2100"/>
+                <a:spcPts val="2000"/>
               </a:lnSpc>
               <a:buNone/>
             </a:pPr>
             <a:r>
-              <a:rPr lang="en-US" sz="1400" dirty="0">
+              <a:rPr lang="en-US" sz="1300" dirty="0">
                 <a:solidFill>
-                  <a:srgbClr val="16191D"/>
+                  <a:srgbClr val="5F6672"/>
                 </a:solidFill>
                 <a:latin typeface="Yu Gothic" pitchFamily="34" charset="0"/>
                 <a:ea typeface="Yu Gothic" pitchFamily="34" charset="-122"/>
                 <a:cs typeface="Yu Gothic" pitchFamily="34" charset="-120"/>
               </a:rPr>
-              <a:t>次のうち NP完全と知られているものはどれか。(a) 配列のソート (b) 数独（n×n に一般化） (c) 二分探索 (d) グラフの最短経路</a:t>
-            </a:r>
-            <a:endParaRPr lang="en-US" sz="1400" dirty="0"/>
+              <a:t>素因数分解が NP完全ではないからである。NP には属するが、P と NP完全の中間にあると見られている。量子計算機が効くと分かっているのは、この中間の領域である。</a:t>
+            </a:r>
+            <a:endParaRPr lang="en-US" sz="1300" dirty="0"/>
+          </a:p>
+        </p:txBody>
+      </p:sp>
+      <p:sp>
+        <p:nvSpPr>
+          <p:cNvPr id="12" name="Text 10"/>
+          <p:cNvSpPr/>
+          <p:nvPr/>
+        </p:nvSpPr>
+        <p:spPr>
+          <a:xfrm>
+            <a:off x="6309360" y="4114800"/>
+            <a:ext cx="5166360" cy="320040"/>
+          </a:xfrm>
+          <a:prstGeom prst="rect">
+            <a:avLst/>
+          </a:prstGeom>
+          <a:noFill/>
+          <a:ln/>
+        </p:spPr>
+        <p:txBody>
+          <a:bodyPr wrap="square" lIns="0" tIns="0" rIns="0" bIns="0" rtlCol="0" anchor="ctr"/>
+          <a:lstStyle/>
+          <a:p>
+            <a:pPr indent="0" marL="0">
+              <a:buNone/>
+            </a:pPr>
+            <a:r>
+              <a:rPr lang="en-US" sz="1300" b="1" dirty="0">
+                <a:solidFill>
+                  <a:srgbClr val="0B5CAD"/>
+                </a:solidFill>
+                <a:latin typeface="Yu Gothic" pitchFamily="34" charset="0"/>
+                <a:ea typeface="Yu Gothic" pitchFamily="34" charset="-122"/>
+                <a:cs typeface="Yu Gothic" pitchFamily="34" charset="-120"/>
+              </a:rPr>
+              <a:t>素因数分解と離散対数には「周期を見つける」構造がある</a:t>
+            </a:r>
+            <a:endParaRPr lang="en-US" sz="1300" dirty="0"/>
+          </a:p>
+        </p:txBody>
+      </p:sp>
+      <p:sp>
+        <p:nvSpPr>
+          <p:cNvPr id="13" name="Text 11"/>
+          <p:cNvSpPr/>
+          <p:nvPr/>
+        </p:nvSpPr>
+        <p:spPr>
+          <a:xfrm>
+            <a:off x="685800" y="5852160"/>
+            <a:ext cx="10789920" cy="512064"/>
+          </a:xfrm>
+          <a:prstGeom prst="rect">
+            <a:avLst/>
+          </a:prstGeom>
+          <a:noFill/>
+          <a:ln/>
+        </p:spPr>
+        <p:txBody>
+          <a:bodyPr wrap="square" lIns="0" tIns="0" rIns="0" bIns="0" rtlCol="0" anchor="ctr"/>
+          <a:lstStyle/>
+          <a:p>
+            <a:pPr indent="0" marL="0">
+              <a:lnSpc>
+                <a:spcPts val="1900"/>
+              </a:lnSpc>
+              <a:buNone/>
+            </a:pPr>
+            <a:r>
+              <a:rPr lang="en-US" sz="1300" b="1" dirty="0">
+                <a:solidFill>
+                  <a:srgbClr val="0B5CAD"/>
+                </a:solidFill>
+                <a:latin typeface="Yu Gothic" pitchFamily="34" charset="0"/>
+                <a:ea typeface="Yu Gothic" pitchFamily="34" charset="-122"/>
+                <a:cs typeface="Yu Gothic" pitchFamily="34" charset="-120"/>
+              </a:rPr>
+              <a:t>強みは「難しい問題を何でも速く解く」ことではなく、特定の構造を持つ問題に刺さること。第12回の暗号に効いてくる。</a:t>
+            </a:r>
+            <a:endParaRPr lang="en-US" sz="1300" dirty="0"/>
           </a:p>
         </p:txBody>
       </p:sp>
@@ -14573,6 +14714,1158 @@
 <file path=ppt/slides/slide21.xml><?xml version="1.0" encoding="utf-8"?>
 <p:sld xmlns:a="http://schemas.openxmlformats.org/drawingml/2006/main" xmlns:r="http://schemas.openxmlformats.org/officeDocument/2006/relationships" xmlns:p="http://schemas.openxmlformats.org/presentationml/2006/main">
   <p:cSld name="Slide 21">
+    <p:bg>
+      <p:bgPr>
+        <a:solidFill>
+          <a:srgbClr val="FFFFFF"/>
+        </a:solidFill>
+      </p:bgPr>
+    </p:bg>
+    <p:spTree>
+      <p:nvGrpSpPr>
+        <p:cNvPr id="1" name=""/>
+        <p:cNvGrpSpPr/>
+        <p:nvPr/>
+      </p:nvGrpSpPr>
+      <p:grpSpPr>
+        <a:xfrm>
+          <a:off x="0" y="0"/>
+          <a:ext cx="0" cy="0"/>
+          <a:chOff x="0" y="0"/>
+          <a:chExt cx="0" cy="0"/>
+        </a:xfrm>
+      </p:grpSpPr>
+      <p:sp>
+        <p:nvSpPr>
+          <p:cNvPr id="2" name="Text 0"/>
+          <p:cNvSpPr/>
+          <p:nvPr/>
+        </p:nvSpPr>
+        <p:spPr>
+          <a:xfrm>
+            <a:off x="566928" y="310896"/>
+            <a:ext cx="4572000" cy="256032"/>
+          </a:xfrm>
+          <a:prstGeom prst="rect">
+            <a:avLst/>
+          </a:prstGeom>
+          <a:noFill/>
+          <a:ln/>
+        </p:spPr>
+        <p:txBody>
+          <a:bodyPr wrap="square" lIns="0" tIns="0" rIns="0" bIns="0" rtlCol="0" anchor="ctr"/>
+          <a:lstStyle/>
+          <a:p>
+            <a:pPr indent="0" marL="0">
+              <a:buNone/>
+            </a:pPr>
+            <a:r>
+              <a:rPr lang="en-US" sz="1200" b="1" dirty="0">
+                <a:solidFill>
+                  <a:srgbClr val="0B5CAD"/>
+                </a:solidFill>
+                <a:latin typeface="Yu Gothic" pitchFamily="34" charset="0"/>
+                <a:ea typeface="Yu Gothic" pitchFamily="34" charset="-122"/>
+                <a:cs typeface="Yu Gothic" pitchFamily="34" charset="-120"/>
+              </a:rPr>
+              <a:t>2.4　計算量</a:t>
+            </a:r>
+            <a:endParaRPr lang="en-US" sz="1200" dirty="0"/>
+          </a:p>
+        </p:txBody>
+      </p:sp>
+      <p:sp>
+        <p:nvSpPr>
+          <p:cNvPr id="3" name="Text 1"/>
+          <p:cNvSpPr/>
+          <p:nvPr/>
+        </p:nvSpPr>
+        <p:spPr>
+          <a:xfrm>
+            <a:off x="548640" y="603504"/>
+            <a:ext cx="11064240" cy="731520"/>
+          </a:xfrm>
+          <a:prstGeom prst="rect">
+            <a:avLst/>
+          </a:prstGeom>
+          <a:noFill/>
+          <a:ln/>
+        </p:spPr>
+        <p:txBody>
+          <a:bodyPr wrap="square" lIns="0" tIns="0" rIns="0" bIns="0" rtlCol="0" anchor="t"/>
+          <a:lstStyle/>
+          <a:p>
+            <a:pPr indent="0" marL="0">
+              <a:buNone/>
+            </a:pPr>
+            <a:r>
+              <a:rPr lang="en-US" sz="3000" b="1" dirty="0">
+                <a:solidFill>
+                  <a:srgbClr val="16191D"/>
+                </a:solidFill>
+                <a:latin typeface="Yu Gothic" pitchFamily="34" charset="0"/>
+                <a:ea typeface="Yu Gothic" pitchFamily="34" charset="-122"/>
+                <a:cs typeface="Yu Gothic" pitchFamily="34" charset="-120"/>
+              </a:rPr>
+              <a:t>第1回との関係</a:t>
+            </a:r>
+            <a:endParaRPr lang="en-US" sz="3000" dirty="0"/>
+          </a:p>
+        </p:txBody>
+      </p:sp>
+      <p:sp>
+        <p:nvSpPr>
+          <p:cNvPr id="4" name="Text 2"/>
+          <p:cNvSpPr/>
+          <p:nvPr/>
+        </p:nvSpPr>
+        <p:spPr>
+          <a:xfrm>
+            <a:off x="11247120" y="6355080"/>
+            <a:ext cx="548640" cy="274320"/>
+          </a:xfrm>
+          <a:prstGeom prst="rect">
+            <a:avLst/>
+          </a:prstGeom>
+          <a:noFill/>
+          <a:ln/>
+        </p:spPr>
+        <p:txBody>
+          <a:bodyPr wrap="square" lIns="0" tIns="0" rIns="0" bIns="0" rtlCol="0" anchor="ctr"/>
+          <a:lstStyle/>
+          <a:p>
+            <a:pPr algn="r" indent="0" marL="0">
+              <a:buNone/>
+            </a:pPr>
+            <a:r>
+              <a:rPr lang="en-US" sz="1000" dirty="0">
+                <a:solidFill>
+                  <a:srgbClr val="5F6672"/>
+                </a:solidFill>
+                <a:latin typeface="Yu Gothic" pitchFamily="34" charset="0"/>
+                <a:ea typeface="Yu Gothic" pitchFamily="34" charset="-122"/>
+                <a:cs typeface="Yu Gothic" pitchFamily="34" charset="-120"/>
+              </a:rPr>
+              <a:t>21</a:t>
+            </a:r>
+            <a:endParaRPr lang="en-US" sz="1000" dirty="0"/>
+          </a:p>
+        </p:txBody>
+      </p:sp>
+      <p:sp>
+        <p:nvSpPr>
+          <p:cNvPr id="5" name="Shape 3"/>
+          <p:cNvSpPr/>
+          <p:nvPr/>
+        </p:nvSpPr>
+        <p:spPr>
+          <a:xfrm>
+            <a:off x="685800" y="1527048"/>
+            <a:ext cx="10789920" cy="713232"/>
+          </a:xfrm>
+          <a:prstGeom prst="roundRect">
+            <a:avLst>
+              <a:gd name="adj" fmla="val 7692"/>
+            </a:avLst>
+          </a:prstGeom>
+          <a:solidFill>
+            <a:srgbClr val="D9E6F4"/>
+          </a:solidFill>
+          <a:ln w="19050">
+            <a:solidFill>
+              <a:srgbClr val="0B5CAD"/>
+            </a:solidFill>
+            <a:prstDash val="solid"/>
+          </a:ln>
+        </p:spPr>
+      </p:sp>
+      <p:sp>
+        <p:nvSpPr>
+          <p:cNvPr id="6" name="Text 4"/>
+          <p:cNvSpPr/>
+          <p:nvPr/>
+        </p:nvSpPr>
+        <p:spPr>
+          <a:xfrm>
+            <a:off x="914400" y="1682496"/>
+            <a:ext cx="10332720" cy="402336"/>
+          </a:xfrm>
+          <a:prstGeom prst="rect">
+            <a:avLst/>
+          </a:prstGeom>
+          <a:noFill/>
+          <a:ln/>
+        </p:spPr>
+        <p:txBody>
+          <a:bodyPr wrap="square" lIns="0" tIns="0" rIns="0" bIns="0" rtlCol="0" anchor="ctr"/>
+          <a:lstStyle/>
+          <a:p>
+            <a:pPr indent="0" marL="0">
+              <a:buNone/>
+            </a:pPr>
+            <a:r>
+              <a:rPr lang="en-US" sz="1700" b="1" dirty="0">
+                <a:solidFill>
+                  <a:srgbClr val="0B5CAD"/>
+                </a:solidFill>
+                <a:latin typeface="Yu Gothic" pitchFamily="34" charset="0"/>
+                <a:ea typeface="Yu Gothic" pitchFamily="34" charset="-122"/>
+                <a:cs typeface="Yu Gothic" pitchFamily="34" charset="-120"/>
+              </a:rPr>
+              <a:t>計算できるか（第1回）と、現実的な時間で計算できるか（今回）は別の問い</a:t>
+            </a:r>
+            <a:endParaRPr lang="en-US" sz="1700" dirty="0"/>
+          </a:p>
+        </p:txBody>
+      </p:sp>
+      <p:sp>
+        <p:nvSpPr>
+          <p:cNvPr id="7" name="Text 5"/>
+          <p:cNvSpPr/>
+          <p:nvPr/>
+        </p:nvSpPr>
+        <p:spPr>
+          <a:xfrm>
+            <a:off x="1188720" y="2487168"/>
+            <a:ext cx="4572000" cy="457200"/>
+          </a:xfrm>
+          <a:prstGeom prst="rect">
+            <a:avLst/>
+          </a:prstGeom>
+          <a:noFill/>
+          <a:ln/>
+        </p:spPr>
+        <p:txBody>
+          <a:bodyPr wrap="square" lIns="0" tIns="0" rIns="0" bIns="0" rtlCol="0" anchor="ctr"/>
+          <a:lstStyle/>
+          <a:p>
+            <a:pPr algn="r" indent="0" marL="0">
+              <a:buNone/>
+            </a:pPr>
+            <a:r>
+              <a:rPr lang="en-US" sz="1500" dirty="0">
+                <a:solidFill>
+                  <a:srgbClr val="16191D"/>
+                </a:solidFill>
+                <a:latin typeface="Yu Gothic" pitchFamily="34" charset="0"/>
+                <a:ea typeface="Yu Gothic" pitchFamily="34" charset="-122"/>
+                <a:cs typeface="Yu Gothic" pitchFamily="34" charset="-120"/>
+              </a:rPr>
+              <a:t>計算不可能</a:t>
+            </a:r>
+            <a:endParaRPr lang="en-US" sz="1500" dirty="0"/>
+          </a:p>
+        </p:txBody>
+      </p:sp>
+      <p:sp>
+        <p:nvSpPr>
+          <p:cNvPr id="8" name="Shape 6"/>
+          <p:cNvSpPr/>
+          <p:nvPr/>
+        </p:nvSpPr>
+        <p:spPr>
+          <a:xfrm>
+            <a:off x="5943600" y="2615184"/>
+            <a:ext cx="640080" cy="201168"/>
+          </a:xfrm>
+          <a:prstGeom prst="rightArrow">
+            <a:avLst/>
+          </a:prstGeom>
+          <a:solidFill>
+            <a:srgbClr val="0B5CAD"/>
+          </a:solidFill>
+          <a:ln/>
+        </p:spPr>
+      </p:sp>
+      <p:sp>
+        <p:nvSpPr>
+          <p:cNvPr id="9" name="Text 7"/>
+          <p:cNvSpPr/>
+          <p:nvPr/>
+        </p:nvSpPr>
+        <p:spPr>
+          <a:xfrm>
+            <a:off x="6766560" y="2487168"/>
+            <a:ext cx="4206240" cy="457200"/>
+          </a:xfrm>
+          <a:prstGeom prst="rect">
+            <a:avLst/>
+          </a:prstGeom>
+          <a:noFill/>
+          <a:ln/>
+        </p:spPr>
+        <p:txBody>
+          <a:bodyPr wrap="square" lIns="0" tIns="0" rIns="0" bIns="0" rtlCol="0" anchor="ctr"/>
+          <a:lstStyle/>
+          <a:p>
+            <a:pPr indent="0" marL="0">
+              <a:buNone/>
+            </a:pPr>
+            <a:r>
+              <a:rPr lang="en-US" sz="1600" b="1" dirty="0">
+                <a:solidFill>
+                  <a:srgbClr val="0B5CAD"/>
+                </a:solidFill>
+                <a:latin typeface="Yu Gothic" pitchFamily="34" charset="0"/>
+                <a:ea typeface="Yu Gothic" pitchFamily="34" charset="-122"/>
+                <a:cs typeface="Yu Gothic" pitchFamily="34" charset="-120"/>
+              </a:rPr>
+              <a:t>停止問題（第1回）</a:t>
+            </a:r>
+            <a:endParaRPr lang="en-US" sz="1600" dirty="0"/>
+          </a:p>
+        </p:txBody>
+      </p:sp>
+      <p:sp>
+        <p:nvSpPr>
+          <p:cNvPr id="10" name="Text 8"/>
+          <p:cNvSpPr/>
+          <p:nvPr/>
+        </p:nvSpPr>
+        <p:spPr>
+          <a:xfrm>
+            <a:off x="1188720" y="3108960"/>
+            <a:ext cx="4572000" cy="457200"/>
+          </a:xfrm>
+          <a:prstGeom prst="rect">
+            <a:avLst/>
+          </a:prstGeom>
+          <a:noFill/>
+          <a:ln/>
+        </p:spPr>
+        <p:txBody>
+          <a:bodyPr wrap="square" lIns="0" tIns="0" rIns="0" bIns="0" rtlCol="0" anchor="ctr"/>
+          <a:lstStyle/>
+          <a:p>
+            <a:pPr algn="r" indent="0" marL="0">
+              <a:buNone/>
+            </a:pPr>
+            <a:r>
+              <a:rPr lang="en-US" sz="1500" dirty="0">
+                <a:solidFill>
+                  <a:srgbClr val="16191D"/>
+                </a:solidFill>
+                <a:latin typeface="Yu Gothic" pitchFamily="34" charset="0"/>
+                <a:ea typeface="Yu Gothic" pitchFamily="34" charset="-122"/>
+                <a:cs typeface="Yu Gothic" pitchFamily="34" charset="-120"/>
+              </a:rPr>
+              <a:t>指数時間しか知られていない</a:t>
+            </a:r>
+            <a:endParaRPr lang="en-US" sz="1500" dirty="0"/>
+          </a:p>
+        </p:txBody>
+      </p:sp>
+      <p:sp>
+        <p:nvSpPr>
+          <p:cNvPr id="11" name="Shape 9"/>
+          <p:cNvSpPr/>
+          <p:nvPr/>
+        </p:nvSpPr>
+        <p:spPr>
+          <a:xfrm>
+            <a:off x="5943600" y="3236976"/>
+            <a:ext cx="640080" cy="201168"/>
+          </a:xfrm>
+          <a:prstGeom prst="rightArrow">
+            <a:avLst/>
+          </a:prstGeom>
+          <a:solidFill>
+            <a:srgbClr val="0B5CAD"/>
+          </a:solidFill>
+          <a:ln/>
+        </p:spPr>
+      </p:sp>
+      <p:sp>
+        <p:nvSpPr>
+          <p:cNvPr id="12" name="Text 10"/>
+          <p:cNvSpPr/>
+          <p:nvPr/>
+        </p:nvSpPr>
+        <p:spPr>
+          <a:xfrm>
+            <a:off x="6766560" y="3108960"/>
+            <a:ext cx="4206240" cy="457200"/>
+          </a:xfrm>
+          <a:prstGeom prst="rect">
+            <a:avLst/>
+          </a:prstGeom>
+          <a:noFill/>
+          <a:ln/>
+        </p:spPr>
+        <p:txBody>
+          <a:bodyPr wrap="square" lIns="0" tIns="0" rIns="0" bIns="0" rtlCol="0" anchor="ctr"/>
+          <a:lstStyle/>
+          <a:p>
+            <a:pPr indent="0" marL="0">
+              <a:buNone/>
+            </a:pPr>
+            <a:r>
+              <a:rPr lang="en-US" sz="1600" b="1" dirty="0">
+                <a:solidFill>
+                  <a:srgbClr val="0B5CAD"/>
+                </a:solidFill>
+                <a:latin typeface="Yu Gothic" pitchFamily="34" charset="0"/>
+                <a:ea typeface="Yu Gothic" pitchFamily="34" charset="-122"/>
+                <a:cs typeface="Yu Gothic" pitchFamily="34" charset="-120"/>
+              </a:rPr>
+              <a:t>NP完全（今回）</a:t>
+            </a:r>
+            <a:endParaRPr lang="en-US" sz="1600" dirty="0"/>
+          </a:p>
+        </p:txBody>
+      </p:sp>
+      <p:sp>
+        <p:nvSpPr>
+          <p:cNvPr id="13" name="Text 11"/>
+          <p:cNvSpPr/>
+          <p:nvPr/>
+        </p:nvSpPr>
+        <p:spPr>
+          <a:xfrm>
+            <a:off x="1188720" y="3730752"/>
+            <a:ext cx="4572000" cy="457200"/>
+          </a:xfrm>
+          <a:prstGeom prst="rect">
+            <a:avLst/>
+          </a:prstGeom>
+          <a:noFill/>
+          <a:ln/>
+        </p:spPr>
+        <p:txBody>
+          <a:bodyPr wrap="square" lIns="0" tIns="0" rIns="0" bIns="0" rtlCol="0" anchor="ctr"/>
+          <a:lstStyle/>
+          <a:p>
+            <a:pPr algn="r" indent="0" marL="0">
+              <a:buNone/>
+            </a:pPr>
+            <a:r>
+              <a:rPr lang="en-US" sz="1500" dirty="0">
+                <a:solidFill>
+                  <a:srgbClr val="16191D"/>
+                </a:solidFill>
+                <a:latin typeface="Yu Gothic" pitchFamily="34" charset="0"/>
+                <a:ea typeface="Yu Gothic" pitchFamily="34" charset="-122"/>
+                <a:cs typeface="Yu Gothic" pitchFamily="34" charset="-120"/>
+              </a:rPr>
+              <a:t>多項式時間で解ける</a:t>
+            </a:r>
+            <a:endParaRPr lang="en-US" sz="1500" dirty="0"/>
+          </a:p>
+        </p:txBody>
+      </p:sp>
+      <p:sp>
+        <p:nvSpPr>
+          <p:cNvPr id="14" name="Shape 12"/>
+          <p:cNvSpPr/>
+          <p:nvPr/>
+        </p:nvSpPr>
+        <p:spPr>
+          <a:xfrm>
+            <a:off x="5943600" y="3858768"/>
+            <a:ext cx="640080" cy="201168"/>
+          </a:xfrm>
+          <a:prstGeom prst="rightArrow">
+            <a:avLst/>
+          </a:prstGeom>
+          <a:solidFill>
+            <a:srgbClr val="0B5CAD"/>
+          </a:solidFill>
+          <a:ln/>
+        </p:spPr>
+      </p:sp>
+      <p:sp>
+        <p:nvSpPr>
+          <p:cNvPr id="15" name="Text 13"/>
+          <p:cNvSpPr/>
+          <p:nvPr/>
+        </p:nvSpPr>
+        <p:spPr>
+          <a:xfrm>
+            <a:off x="6766560" y="3730752"/>
+            <a:ext cx="4206240" cy="457200"/>
+          </a:xfrm>
+          <a:prstGeom prst="rect">
+            <a:avLst/>
+          </a:prstGeom>
+          <a:noFill/>
+          <a:ln/>
+        </p:spPr>
+        <p:txBody>
+          <a:bodyPr wrap="square" lIns="0" tIns="0" rIns="0" bIns="0" rtlCol="0" anchor="ctr"/>
+          <a:lstStyle/>
+          <a:p>
+            <a:pPr indent="0" marL="0">
+              <a:buNone/>
+            </a:pPr>
+            <a:r>
+              <a:rPr lang="en-US" sz="1600" b="1" dirty="0">
+                <a:solidFill>
+                  <a:srgbClr val="0B5CAD"/>
+                </a:solidFill>
+                <a:latin typeface="Yu Gothic" pitchFamily="34" charset="0"/>
+                <a:ea typeface="Yu Gothic" pitchFamily="34" charset="-122"/>
+                <a:cs typeface="Yu Gothic" pitchFamily="34" charset="-120"/>
+              </a:rPr>
+              <a:t>クラス P</a:t>
+            </a:r>
+            <a:endParaRPr lang="en-US" sz="1600" dirty="0"/>
+          </a:p>
+        </p:txBody>
+      </p:sp>
+      <p:sp>
+        <p:nvSpPr>
+          <p:cNvPr id="16" name="Text 14"/>
+          <p:cNvSpPr/>
+          <p:nvPr/>
+        </p:nvSpPr>
+        <p:spPr>
+          <a:xfrm>
+            <a:off x="685800" y="4443984"/>
+            <a:ext cx="10789920" cy="457200"/>
+          </a:xfrm>
+          <a:prstGeom prst="rect">
+            <a:avLst/>
+          </a:prstGeom>
+          <a:noFill/>
+          <a:ln/>
+        </p:spPr>
+        <p:txBody>
+          <a:bodyPr wrap="square" lIns="0" tIns="0" rIns="0" bIns="0" rtlCol="0" anchor="ctr"/>
+          <a:lstStyle/>
+          <a:p>
+            <a:pPr indent="0" marL="0">
+              <a:lnSpc>
+                <a:spcPts val="2000"/>
+              </a:lnSpc>
+              <a:buNone/>
+            </a:pPr>
+            <a:r>
+              <a:rPr lang="en-US" sz="1300" dirty="0">
+                <a:solidFill>
+                  <a:srgbClr val="5F6672"/>
+                </a:solidFill>
+                <a:latin typeface="Yu Gothic" pitchFamily="34" charset="0"/>
+                <a:ea typeface="Yu Gothic" pitchFamily="34" charset="-122"/>
+                <a:cs typeface="Yu Gothic" pitchFamily="34" charset="-120"/>
+              </a:rPr>
+              <a:t>この2段階の壁が、以降の講義に何度も顔を出す。第12回の公開鍵暗号は「素因数分解が P に属すると</a:t>
+            </a:r>
+            <a:endParaRPr lang="en-US" sz="1300" dirty="0"/>
+          </a:p>
+          <a:p>
+            <a:pPr indent="0" marL="0">
+              <a:lnSpc>
+                <a:spcPts val="2000"/>
+              </a:lnSpc>
+              <a:buNone/>
+            </a:pPr>
+            <a:r>
+              <a:rPr lang="en-US" sz="1300" dirty="0">
+                <a:solidFill>
+                  <a:srgbClr val="5F6672"/>
+                </a:solidFill>
+                <a:latin typeface="Yu Gothic" pitchFamily="34" charset="0"/>
+                <a:ea typeface="Yu Gothic" pitchFamily="34" charset="-122"/>
+                <a:cs typeface="Yu Gothic" pitchFamily="34" charset="-120"/>
+              </a:rPr>
+              <a:t>知られていない」ことに安全性を託しているし、第13回の機械学習は「厳密に解けない問題を近似で押し切る」道具立てである。</a:t>
+            </a:r>
+            <a:endParaRPr lang="en-US" sz="1300" dirty="0"/>
+          </a:p>
+        </p:txBody>
+      </p:sp>
+    </p:spTree>
+  </p:cSld>
+  <p:clrMapOvr>
+    <a:masterClrMapping/>
+  </p:clrMapOvr>
+</p:sld>
+</file>
+
+<file path=ppt/slides/slide22.xml><?xml version="1.0" encoding="utf-8"?>
+<p:sld xmlns:a="http://schemas.openxmlformats.org/drawingml/2006/main" xmlns:r="http://schemas.openxmlformats.org/officeDocument/2006/relationships" xmlns:p="http://schemas.openxmlformats.org/presentationml/2006/main">
+  <p:cSld name="Slide 22">
+    <p:bg>
+      <p:bgPr>
+        <a:solidFill>
+          <a:srgbClr val="FFFFFF"/>
+        </a:solidFill>
+      </p:bgPr>
+    </p:bg>
+    <p:spTree>
+      <p:nvGrpSpPr>
+        <p:cNvPr id="1" name=""/>
+        <p:cNvGrpSpPr/>
+        <p:nvPr/>
+      </p:nvGrpSpPr>
+      <p:grpSpPr>
+        <a:xfrm>
+          <a:off x="0" y="0"/>
+          <a:ext cx="0" cy="0"/>
+          <a:chOff x="0" y="0"/>
+          <a:chExt cx="0" cy="0"/>
+        </a:xfrm>
+      </p:grpSpPr>
+      <p:sp>
+        <p:nvSpPr>
+          <p:cNvPr id="2" name="Text 0"/>
+          <p:cNvSpPr/>
+          <p:nvPr/>
+        </p:nvSpPr>
+        <p:spPr>
+          <a:xfrm>
+            <a:off x="566928" y="310896"/>
+            <a:ext cx="4572000" cy="256032"/>
+          </a:xfrm>
+          <a:prstGeom prst="rect">
+            <a:avLst/>
+          </a:prstGeom>
+          <a:noFill/>
+          <a:ln/>
+        </p:spPr>
+        <p:txBody>
+          <a:bodyPr wrap="square" lIns="0" tIns="0" rIns="0" bIns="0" rtlCol="0" anchor="ctr"/>
+          <a:lstStyle/>
+          <a:p>
+            <a:pPr indent="0" marL="0">
+              <a:buNone/>
+            </a:pPr>
+            <a:r>
+              <a:rPr lang="en-US" sz="1200" b="1" dirty="0">
+                <a:solidFill>
+                  <a:srgbClr val="0B5CAD"/>
+                </a:solidFill>
+                <a:latin typeface="Yu Gothic" pitchFamily="34" charset="0"/>
+                <a:ea typeface="Yu Gothic" pitchFamily="34" charset="-122"/>
+                <a:cs typeface="Yu Gothic" pitchFamily="34" charset="-120"/>
+              </a:rPr>
+              <a:t>第2回</a:t>
+            </a:r>
+            <a:endParaRPr lang="en-US" sz="1200" dirty="0"/>
+          </a:p>
+        </p:txBody>
+      </p:sp>
+      <p:sp>
+        <p:nvSpPr>
+          <p:cNvPr id="3" name="Text 1"/>
+          <p:cNvSpPr/>
+          <p:nvPr/>
+        </p:nvSpPr>
+        <p:spPr>
+          <a:xfrm>
+            <a:off x="548640" y="603504"/>
+            <a:ext cx="11064240" cy="731520"/>
+          </a:xfrm>
+          <a:prstGeom prst="rect">
+            <a:avLst/>
+          </a:prstGeom>
+          <a:noFill/>
+          <a:ln/>
+        </p:spPr>
+        <p:txBody>
+          <a:bodyPr wrap="square" lIns="0" tIns="0" rIns="0" bIns="0" rtlCol="0" anchor="t"/>
+          <a:lstStyle/>
+          <a:p>
+            <a:pPr indent="0" marL="0">
+              <a:buNone/>
+            </a:pPr>
+            <a:r>
+              <a:rPr lang="en-US" sz="3000" b="1" dirty="0">
+                <a:solidFill>
+                  <a:srgbClr val="16191D"/>
+                </a:solidFill>
+                <a:latin typeface="Yu Gothic" pitchFamily="34" charset="0"/>
+                <a:ea typeface="Yu Gothic" pitchFamily="34" charset="-122"/>
+                <a:cs typeface="Yu Gothic" pitchFamily="34" charset="-120"/>
+              </a:rPr>
+              <a:t>演習</a:t>
+            </a:r>
+            <a:endParaRPr lang="en-US" sz="3000" dirty="0"/>
+          </a:p>
+        </p:txBody>
+      </p:sp>
+      <p:sp>
+        <p:nvSpPr>
+          <p:cNvPr id="4" name="Text 2"/>
+          <p:cNvSpPr/>
+          <p:nvPr/>
+        </p:nvSpPr>
+        <p:spPr>
+          <a:xfrm>
+            <a:off x="11247120" y="6355080"/>
+            <a:ext cx="548640" cy="274320"/>
+          </a:xfrm>
+          <a:prstGeom prst="rect">
+            <a:avLst/>
+          </a:prstGeom>
+          <a:noFill/>
+          <a:ln/>
+        </p:spPr>
+        <p:txBody>
+          <a:bodyPr wrap="square" lIns="0" tIns="0" rIns="0" bIns="0" rtlCol="0" anchor="ctr"/>
+          <a:lstStyle/>
+          <a:p>
+            <a:pPr algn="r" indent="0" marL="0">
+              <a:buNone/>
+            </a:pPr>
+            <a:r>
+              <a:rPr lang="en-US" sz="1000" dirty="0">
+                <a:solidFill>
+                  <a:srgbClr val="5F6672"/>
+                </a:solidFill>
+                <a:latin typeface="Yu Gothic" pitchFamily="34" charset="0"/>
+                <a:ea typeface="Yu Gothic" pitchFamily="34" charset="-122"/>
+                <a:cs typeface="Yu Gothic" pitchFamily="34" charset="-120"/>
+              </a:rPr>
+              <a:t>22</a:t>
+            </a:r>
+            <a:endParaRPr lang="en-US" sz="1000" dirty="0"/>
+          </a:p>
+        </p:txBody>
+      </p:sp>
+      <p:sp>
+        <p:nvSpPr>
+          <p:cNvPr id="5" name="Shape 3"/>
+          <p:cNvSpPr/>
+          <p:nvPr/>
+        </p:nvSpPr>
+        <p:spPr>
+          <a:xfrm>
+            <a:off x="685800" y="1691640"/>
+            <a:ext cx="868680" cy="402336"/>
+          </a:xfrm>
+          <a:prstGeom prst="roundRect">
+            <a:avLst>
+              <a:gd name="adj" fmla="val 18182"/>
+            </a:avLst>
+          </a:prstGeom>
+          <a:solidFill>
+            <a:srgbClr val="D9E6F4"/>
+          </a:solidFill>
+          <a:ln w="12700">
+            <a:solidFill>
+              <a:srgbClr val="0B5CAD"/>
+            </a:solidFill>
+            <a:prstDash val="solid"/>
+          </a:ln>
+        </p:spPr>
+      </p:sp>
+      <p:sp>
+        <p:nvSpPr>
+          <p:cNvPr id="6" name="Text 4"/>
+          <p:cNvSpPr/>
+          <p:nvPr/>
+        </p:nvSpPr>
+        <p:spPr>
+          <a:xfrm>
+            <a:off x="685800" y="1691640"/>
+            <a:ext cx="868680" cy="402336"/>
+          </a:xfrm>
+          <a:prstGeom prst="rect">
+            <a:avLst/>
+          </a:prstGeom>
+          <a:noFill/>
+          <a:ln/>
+        </p:spPr>
+        <p:txBody>
+          <a:bodyPr wrap="square" lIns="0" tIns="0" rIns="0" bIns="0" rtlCol="0" anchor="ctr"/>
+          <a:lstStyle/>
+          <a:p>
+            <a:pPr algn="ctr" indent="0" marL="0">
+              <a:buNone/>
+            </a:pPr>
+            <a:r>
+              <a:rPr lang="en-US" sz="1300" b="1" dirty="0">
+                <a:solidFill>
+                  <a:srgbClr val="0B5CAD"/>
+                </a:solidFill>
+                <a:latin typeface="Courier New" pitchFamily="34" charset="0"/>
+                <a:ea typeface="Courier New" pitchFamily="34" charset="-122"/>
+                <a:cs typeface="Courier New" pitchFamily="34" charset="-120"/>
+              </a:rPr>
+              <a:t>2-1</a:t>
+            </a:r>
+            <a:endParaRPr lang="en-US" sz="1300" dirty="0"/>
+          </a:p>
+        </p:txBody>
+      </p:sp>
+      <p:sp>
+        <p:nvSpPr>
+          <p:cNvPr id="7" name="Text 5"/>
+          <p:cNvSpPr/>
+          <p:nvPr/>
+        </p:nvSpPr>
+        <p:spPr>
+          <a:xfrm>
+            <a:off x="1783080" y="1673352"/>
+            <a:ext cx="9692640" cy="932688"/>
+          </a:xfrm>
+          <a:prstGeom prst="rect">
+            <a:avLst/>
+          </a:prstGeom>
+          <a:noFill/>
+          <a:ln/>
+        </p:spPr>
+        <p:txBody>
+          <a:bodyPr wrap="square" lIns="0" tIns="0" rIns="0" bIns="0" rtlCol="0" anchor="t"/>
+          <a:lstStyle/>
+          <a:p>
+            <a:pPr indent="0" marL="0">
+              <a:lnSpc>
+                <a:spcPts val="2100"/>
+              </a:lnSpc>
+              <a:buNone/>
+            </a:pPr>
+            <a:r>
+              <a:rPr lang="en-US" sz="1400" dirty="0">
+                <a:solidFill>
+                  <a:srgbClr val="16191D"/>
+                </a:solidFill>
+                <a:latin typeface="Yu Gothic" pitchFamily="34" charset="0"/>
+                <a:ea typeface="Yu Gothic" pitchFamily="34" charset="-122"/>
+                <a:cs typeface="Yu Gothic" pitchFamily="34" charset="-120"/>
+              </a:rPr>
+              <a:t>10進数 173 を8ビットの2進数で表せ。また、8ビットの2の補数表現で −45 を表せ。</a:t>
+            </a:r>
+            <a:endParaRPr lang="en-US" sz="1400" dirty="0"/>
+          </a:p>
+        </p:txBody>
+      </p:sp>
+      <p:sp>
+        <p:nvSpPr>
+          <p:cNvPr id="8" name="Shape 6"/>
+          <p:cNvSpPr/>
+          <p:nvPr/>
+        </p:nvSpPr>
+        <p:spPr>
+          <a:xfrm>
+            <a:off x="685800" y="2770632"/>
+            <a:ext cx="868680" cy="402336"/>
+          </a:xfrm>
+          <a:prstGeom prst="roundRect">
+            <a:avLst>
+              <a:gd name="adj" fmla="val 18182"/>
+            </a:avLst>
+          </a:prstGeom>
+          <a:solidFill>
+            <a:srgbClr val="D9E6F4"/>
+          </a:solidFill>
+          <a:ln w="12700">
+            <a:solidFill>
+              <a:srgbClr val="0B5CAD"/>
+            </a:solidFill>
+            <a:prstDash val="solid"/>
+          </a:ln>
+        </p:spPr>
+      </p:sp>
+      <p:sp>
+        <p:nvSpPr>
+          <p:cNvPr id="9" name="Text 7"/>
+          <p:cNvSpPr/>
+          <p:nvPr/>
+        </p:nvSpPr>
+        <p:spPr>
+          <a:xfrm>
+            <a:off x="685800" y="2770632"/>
+            <a:ext cx="868680" cy="402336"/>
+          </a:xfrm>
+          <a:prstGeom prst="rect">
+            <a:avLst/>
+          </a:prstGeom>
+          <a:noFill/>
+          <a:ln/>
+        </p:spPr>
+        <p:txBody>
+          <a:bodyPr wrap="square" lIns="0" tIns="0" rIns="0" bIns="0" rtlCol="0" anchor="ctr"/>
+          <a:lstStyle/>
+          <a:p>
+            <a:pPr algn="ctr" indent="0" marL="0">
+              <a:buNone/>
+            </a:pPr>
+            <a:r>
+              <a:rPr lang="en-US" sz="1300" b="1" dirty="0">
+                <a:solidFill>
+                  <a:srgbClr val="0B5CAD"/>
+                </a:solidFill>
+                <a:latin typeface="Courier New" pitchFamily="34" charset="0"/>
+                <a:ea typeface="Courier New" pitchFamily="34" charset="-122"/>
+                <a:cs typeface="Courier New" pitchFamily="34" charset="-120"/>
+              </a:rPr>
+              <a:t>2-2</a:t>
+            </a:r>
+            <a:endParaRPr lang="en-US" sz="1300" dirty="0"/>
+          </a:p>
+        </p:txBody>
+      </p:sp>
+      <p:sp>
+        <p:nvSpPr>
+          <p:cNvPr id="10" name="Text 8"/>
+          <p:cNvSpPr/>
+          <p:nvPr/>
+        </p:nvSpPr>
+        <p:spPr>
+          <a:xfrm>
+            <a:off x="1783080" y="2752344"/>
+            <a:ext cx="9692640" cy="932688"/>
+          </a:xfrm>
+          <a:prstGeom prst="rect">
+            <a:avLst/>
+          </a:prstGeom>
+          <a:noFill/>
+          <a:ln/>
+        </p:spPr>
+        <p:txBody>
+          <a:bodyPr wrap="square" lIns="0" tIns="0" rIns="0" bIns="0" rtlCol="0" anchor="t"/>
+          <a:lstStyle/>
+          <a:p>
+            <a:pPr indent="0" marL="0">
+              <a:lnSpc>
+                <a:spcPts val="2100"/>
+              </a:lnSpc>
+              <a:buNone/>
+            </a:pPr>
+            <a:r>
+              <a:rPr lang="en-US" sz="1400" dirty="0">
+                <a:solidFill>
+                  <a:srgbClr val="16191D"/>
+                </a:solidFill>
+                <a:latin typeface="Yu Gothic" pitchFamily="34" charset="0"/>
+                <a:ea typeface="Yu Gothic" pitchFamily="34" charset="-122"/>
+                <a:cs typeface="Yu Gothic" pitchFamily="34" charset="-120"/>
+              </a:rPr>
+              <a:t>2TB と表示されたSSDを買った。OS が 2⁴⁰ を1TBとして表示する場合、何TBと表示されるか。</a:t>
+            </a:r>
+            <a:endParaRPr lang="en-US" sz="1400" dirty="0"/>
+          </a:p>
+        </p:txBody>
+      </p:sp>
+      <p:sp>
+        <p:nvSpPr>
+          <p:cNvPr id="11" name="Shape 9"/>
+          <p:cNvSpPr/>
+          <p:nvPr/>
+        </p:nvSpPr>
+        <p:spPr>
+          <a:xfrm>
+            <a:off x="685800" y="3849624"/>
+            <a:ext cx="868680" cy="402336"/>
+          </a:xfrm>
+          <a:prstGeom prst="roundRect">
+            <a:avLst>
+              <a:gd name="adj" fmla="val 18182"/>
+            </a:avLst>
+          </a:prstGeom>
+          <a:solidFill>
+            <a:srgbClr val="D9E6F4"/>
+          </a:solidFill>
+          <a:ln w="12700">
+            <a:solidFill>
+              <a:srgbClr val="0B5CAD"/>
+            </a:solidFill>
+            <a:prstDash val="solid"/>
+          </a:ln>
+        </p:spPr>
+      </p:sp>
+      <p:sp>
+        <p:nvSpPr>
+          <p:cNvPr id="12" name="Text 10"/>
+          <p:cNvSpPr/>
+          <p:nvPr/>
+        </p:nvSpPr>
+        <p:spPr>
+          <a:xfrm>
+            <a:off x="685800" y="3849624"/>
+            <a:ext cx="868680" cy="402336"/>
+          </a:xfrm>
+          <a:prstGeom prst="rect">
+            <a:avLst/>
+          </a:prstGeom>
+          <a:noFill/>
+          <a:ln/>
+        </p:spPr>
+        <p:txBody>
+          <a:bodyPr wrap="square" lIns="0" tIns="0" rIns="0" bIns="0" rtlCol="0" anchor="ctr"/>
+          <a:lstStyle/>
+          <a:p>
+            <a:pPr algn="ctr" indent="0" marL="0">
+              <a:buNone/>
+            </a:pPr>
+            <a:r>
+              <a:rPr lang="en-US" sz="1300" b="1" dirty="0">
+                <a:solidFill>
+                  <a:srgbClr val="0B5CAD"/>
+                </a:solidFill>
+                <a:latin typeface="Courier New" pitchFamily="34" charset="0"/>
+                <a:ea typeface="Courier New" pitchFamily="34" charset="-122"/>
+                <a:cs typeface="Courier New" pitchFamily="34" charset="-120"/>
+              </a:rPr>
+              <a:t>2-3</a:t>
+            </a:r>
+            <a:endParaRPr lang="en-US" sz="1300" dirty="0"/>
+          </a:p>
+        </p:txBody>
+      </p:sp>
+      <p:sp>
+        <p:nvSpPr>
+          <p:cNvPr id="13" name="Text 11"/>
+          <p:cNvSpPr/>
+          <p:nvPr/>
+        </p:nvSpPr>
+        <p:spPr>
+          <a:xfrm>
+            <a:off x="1783080" y="3831336"/>
+            <a:ext cx="9692640" cy="932688"/>
+          </a:xfrm>
+          <a:prstGeom prst="rect">
+            <a:avLst/>
+          </a:prstGeom>
+          <a:noFill/>
+          <a:ln/>
+        </p:spPr>
+        <p:txBody>
+          <a:bodyPr wrap="square" lIns="0" tIns="0" rIns="0" bIns="0" rtlCol="0" anchor="t"/>
+          <a:lstStyle/>
+          <a:p>
+            <a:pPr indent="0" marL="0">
+              <a:lnSpc>
+                <a:spcPts val="2100"/>
+              </a:lnSpc>
+              <a:buNone/>
+            </a:pPr>
+            <a:r>
+              <a:rPr lang="en-US" sz="1400" dirty="0">
+                <a:solidFill>
+                  <a:srgbClr val="16191D"/>
+                </a:solidFill>
+                <a:latin typeface="Yu Gothic" pitchFamily="34" charset="0"/>
+                <a:ea typeface="Yu Gothic" pitchFamily="34" charset="-122"/>
+                <a:cs typeface="Yu Gothic" pitchFamily="34" charset="-120"/>
+              </a:rPr>
+              <a:t>ある処理が n=1,000 のとき 1秒かかった。O(n²) だとすると n=10,000 では何秒か。O(n log n) ならどうか。</a:t>
+            </a:r>
+            <a:endParaRPr lang="en-US" sz="1400" dirty="0"/>
+          </a:p>
+        </p:txBody>
+      </p:sp>
+      <p:sp>
+        <p:nvSpPr>
+          <p:cNvPr id="14" name="Shape 12"/>
+          <p:cNvSpPr/>
+          <p:nvPr/>
+        </p:nvSpPr>
+        <p:spPr>
+          <a:xfrm>
+            <a:off x="685800" y="4928616"/>
+            <a:ext cx="868680" cy="402336"/>
+          </a:xfrm>
+          <a:prstGeom prst="roundRect">
+            <a:avLst>
+              <a:gd name="adj" fmla="val 18182"/>
+            </a:avLst>
+          </a:prstGeom>
+          <a:solidFill>
+            <a:srgbClr val="D9E6F4"/>
+          </a:solidFill>
+          <a:ln w="12700">
+            <a:solidFill>
+              <a:srgbClr val="0B5CAD"/>
+            </a:solidFill>
+            <a:prstDash val="solid"/>
+          </a:ln>
+        </p:spPr>
+      </p:sp>
+      <p:sp>
+        <p:nvSpPr>
+          <p:cNvPr id="15" name="Text 13"/>
+          <p:cNvSpPr/>
+          <p:nvPr/>
+        </p:nvSpPr>
+        <p:spPr>
+          <a:xfrm>
+            <a:off x="685800" y="4928616"/>
+            <a:ext cx="868680" cy="402336"/>
+          </a:xfrm>
+          <a:prstGeom prst="rect">
+            <a:avLst/>
+          </a:prstGeom>
+          <a:noFill/>
+          <a:ln/>
+        </p:spPr>
+        <p:txBody>
+          <a:bodyPr wrap="square" lIns="0" tIns="0" rIns="0" bIns="0" rtlCol="0" anchor="ctr"/>
+          <a:lstStyle/>
+          <a:p>
+            <a:pPr algn="ctr" indent="0" marL="0">
+              <a:buNone/>
+            </a:pPr>
+            <a:r>
+              <a:rPr lang="en-US" sz="1300" b="1" dirty="0">
+                <a:solidFill>
+                  <a:srgbClr val="0B5CAD"/>
+                </a:solidFill>
+                <a:latin typeface="Courier New" pitchFamily="34" charset="0"/>
+                <a:ea typeface="Courier New" pitchFamily="34" charset="-122"/>
+                <a:cs typeface="Courier New" pitchFamily="34" charset="-120"/>
+              </a:rPr>
+              <a:t>2-4</a:t>
+            </a:r>
+            <a:endParaRPr lang="en-US" sz="1300" dirty="0"/>
+          </a:p>
+        </p:txBody>
+      </p:sp>
+      <p:sp>
+        <p:nvSpPr>
+          <p:cNvPr id="16" name="Text 14"/>
+          <p:cNvSpPr/>
+          <p:nvPr/>
+        </p:nvSpPr>
+        <p:spPr>
+          <a:xfrm>
+            <a:off x="1783080" y="4910328"/>
+            <a:ext cx="9692640" cy="932688"/>
+          </a:xfrm>
+          <a:prstGeom prst="rect">
+            <a:avLst/>
+          </a:prstGeom>
+          <a:noFill/>
+          <a:ln/>
+        </p:spPr>
+        <p:txBody>
+          <a:bodyPr wrap="square" lIns="0" tIns="0" rIns="0" bIns="0" rtlCol="0" anchor="t"/>
+          <a:lstStyle/>
+          <a:p>
+            <a:pPr indent="0" marL="0">
+              <a:lnSpc>
+                <a:spcPts val="2100"/>
+              </a:lnSpc>
+              <a:buNone/>
+            </a:pPr>
+            <a:r>
+              <a:rPr lang="en-US" sz="1400" dirty="0">
+                <a:solidFill>
+                  <a:srgbClr val="16191D"/>
+                </a:solidFill>
+                <a:latin typeface="Yu Gothic" pitchFamily="34" charset="0"/>
+                <a:ea typeface="Yu Gothic" pitchFamily="34" charset="-122"/>
+                <a:cs typeface="Yu Gothic" pitchFamily="34" charset="-120"/>
+              </a:rPr>
+              <a:t>次のうち NP完全と知られているものはどれか。(a) 配列のソート (b) 数独（n×n に一般化） (c) 二分探索 (d) グラフの最短経路</a:t>
+            </a:r>
+            <a:endParaRPr lang="en-US" sz="1400" dirty="0"/>
+          </a:p>
+        </p:txBody>
+      </p:sp>
+    </p:spTree>
+  </p:cSld>
+  <p:clrMapOvr>
+    <a:masterClrMapping/>
+  </p:clrMapOvr>
+</p:sld>
+</file>
+
+<file path=ppt/slides/slide23.xml><?xml version="1.0" encoding="utf-8"?>
+<p:sld xmlns:a="http://schemas.openxmlformats.org/drawingml/2006/main" xmlns:r="http://schemas.openxmlformats.org/officeDocument/2006/relationships" xmlns:p="http://schemas.openxmlformats.org/presentationml/2006/main">
+  <p:cSld name="Slide 23">
     <p:bg>
       <p:bgPr>
         <a:solidFill>
@@ -14681,7 +15974,7 @@
         <p:spPr>
           <a:xfrm>
             <a:off x="4297680" y="1380744"/>
-            <a:ext cx="7132320" cy="640080"/>
+            <a:ext cx="7132320" cy="548640"/>
           </a:xfrm>
           <a:prstGeom prst="rect">
             <a:avLst/>
@@ -14722,7 +16015,88 @@
         </p:nvSpPr>
         <p:spPr>
           <a:xfrm>
-            <a:off x="822960" y="2167128"/>
+            <a:off x="822960" y="2075688"/>
+            <a:ext cx="3291840" cy="320040"/>
+          </a:xfrm>
+          <a:prstGeom prst="rect">
+            <a:avLst/>
+          </a:prstGeom>
+          <a:noFill/>
+          <a:ln/>
+        </p:spPr>
+        <p:txBody>
+          <a:bodyPr wrap="square" lIns="0" tIns="0" rIns="0" bIns="0" rtlCol="0" anchor="ctr"/>
+          <a:lstStyle/>
+          <a:p>
+            <a:pPr indent="0" marL="0">
+              <a:buNone/>
+            </a:pPr>
+            <a:r>
+              <a:rPr lang="en-US" sz="1400" b="1" dirty="0">
+                <a:solidFill>
+                  <a:srgbClr val="6AB0F3"/>
+                </a:solidFill>
+                <a:latin typeface="Yu Gothic" pitchFamily="34" charset="0"/>
+                <a:ea typeface="Yu Gothic" pitchFamily="34" charset="-122"/>
+                <a:cs typeface="Yu Gothic" pitchFamily="34" charset="-120"/>
+              </a:rPr>
+              <a:t>量子計算機</a:t>
+            </a:r>
+            <a:endParaRPr lang="en-US" sz="1400" dirty="0"/>
+          </a:p>
+        </p:txBody>
+      </p:sp>
+      <p:sp>
+        <p:nvSpPr>
+          <p:cNvPr id="6" name="Text 4"/>
+          <p:cNvSpPr/>
+          <p:nvPr/>
+        </p:nvSpPr>
+        <p:spPr>
+          <a:xfrm>
+            <a:off x="4297680" y="2039112"/>
+            <a:ext cx="7132320" cy="548640"/>
+          </a:xfrm>
+          <a:prstGeom prst="rect">
+            <a:avLst/>
+          </a:prstGeom>
+          <a:noFill/>
+          <a:ln/>
+        </p:spPr>
+        <p:txBody>
+          <a:bodyPr wrap="square" lIns="0" tIns="0" rIns="0" bIns="0" rtlCol="0" anchor="t"/>
+          <a:lstStyle/>
+          <a:p>
+            <a:pPr indent="0" marL="0">
+              <a:lnSpc>
+                <a:spcPts val="1900"/>
+              </a:lnSpc>
+              <a:buNone/>
+            </a:pPr>
+            <a:r>
+              <a:rPr lang="en-US" sz="1250" dirty="0">
+                <a:solidFill>
+                  <a:srgbClr val="E8EBEF"/>
+                </a:solidFill>
+                <a:latin typeface="Yu Gothic" pitchFamily="34" charset="0"/>
+                <a:ea typeface="Yu Gothic" pitchFamily="34" charset="-122"/>
+                <a:cs typeface="Yu Gothic" pitchFamily="34" charset="-120"/>
+              </a:rPr>
+              <a:t>P ⊆ BQP で範囲は変わらない。NP完全も指数時間のまま。効くのは中間の問題</a:t>
+            </a:r>
+            <a:endParaRPr lang="en-US" sz="1250" dirty="0"/>
+          </a:p>
+        </p:txBody>
+      </p:sp>
+      <p:sp>
+        <p:nvSpPr>
+          <p:cNvPr id="7" name="Text 5"/>
+          <p:cNvSpPr/>
+          <p:nvPr/>
+        </p:nvSpPr>
+        <p:spPr>
+          <a:xfrm>
+            <a:off x="822960" y="2734056"/>
             <a:ext cx="3291840" cy="320040"/>
           </a:xfrm>
           <a:prstGeom prst="rect">
@@ -14755,14 +16129,14 @@
       </p:sp>
       <p:sp>
         <p:nvSpPr>
-          <p:cNvPr id="6" name="Text 4"/>
-          <p:cNvSpPr/>
-          <p:nvPr/>
-        </p:nvSpPr>
-        <p:spPr>
-          <a:xfrm>
-            <a:off x="4297680" y="2130552"/>
-            <a:ext cx="7132320" cy="640080"/>
+          <p:cNvPr id="8" name="Text 6"/>
+          <p:cNvSpPr/>
+          <p:nvPr/>
+        </p:nvSpPr>
+        <p:spPr>
+          <a:xfrm>
+            <a:off x="4297680" y="2697480"/>
+            <a:ext cx="7132320" cy="548640"/>
           </a:xfrm>
           <a:prstGeom prst="rect">
             <a:avLst/>
@@ -14797,13 +16171,13 @@
       </p:sp>
       <p:sp>
         <p:nvSpPr>
-          <p:cNvPr id="7" name="Text 5"/>
-          <p:cNvSpPr/>
-          <p:nvPr/>
-        </p:nvSpPr>
-        <p:spPr>
-          <a:xfrm>
-            <a:off x="822960" y="2916936"/>
+          <p:cNvPr id="9" name="Text 7"/>
+          <p:cNvSpPr/>
+          <p:nvPr/>
+        </p:nvSpPr>
+        <p:spPr>
+          <a:xfrm>
+            <a:off x="822960" y="3392424"/>
             <a:ext cx="3291840" cy="320040"/>
           </a:xfrm>
           <a:prstGeom prst="rect">
@@ -14836,14 +16210,14 @@
       </p:sp>
       <p:sp>
         <p:nvSpPr>
-          <p:cNvPr id="8" name="Text 6"/>
-          <p:cNvSpPr/>
-          <p:nvPr/>
-        </p:nvSpPr>
-        <p:spPr>
-          <a:xfrm>
-            <a:off x="4297680" y="2880360"/>
-            <a:ext cx="7132320" cy="640080"/>
+          <p:cNvPr id="10" name="Text 8"/>
+          <p:cNvSpPr/>
+          <p:nvPr/>
+        </p:nvSpPr>
+        <p:spPr>
+          <a:xfrm>
+            <a:off x="4297680" y="3355848"/>
+            <a:ext cx="7132320" cy="548640"/>
           </a:xfrm>
           <a:prstGeom prst="rect">
             <a:avLst/>
@@ -14878,13 +16252,13 @@
       </p:sp>
       <p:sp>
         <p:nvSpPr>
-          <p:cNvPr id="9" name="Text 7"/>
-          <p:cNvSpPr/>
-          <p:nvPr/>
-        </p:nvSpPr>
-        <p:spPr>
-          <a:xfrm>
-            <a:off x="822960" y="3666744"/>
+          <p:cNvPr id="11" name="Text 9"/>
+          <p:cNvSpPr/>
+          <p:nvPr/>
+        </p:nvSpPr>
+        <p:spPr>
+          <a:xfrm>
+            <a:off x="822960" y="4050792"/>
             <a:ext cx="3291840" cy="320040"/>
           </a:xfrm>
           <a:prstGeom prst="rect">
@@ -14917,14 +16291,14 @@
       </p:sp>
       <p:sp>
         <p:nvSpPr>
-          <p:cNvPr id="10" name="Text 8"/>
-          <p:cNvSpPr/>
-          <p:nvPr/>
-        </p:nvSpPr>
-        <p:spPr>
-          <a:xfrm>
-            <a:off x="4297680" y="3630168"/>
-            <a:ext cx="7132320" cy="640080"/>
+          <p:cNvPr id="12" name="Text 10"/>
+          <p:cNvSpPr/>
+          <p:nvPr/>
+        </p:nvSpPr>
+        <p:spPr>
+          <a:xfrm>
+            <a:off x="4297680" y="4014216"/>
+            <a:ext cx="7132320" cy="548640"/>
           </a:xfrm>
           <a:prstGeom prst="rect">
             <a:avLst/>
@@ -14959,13 +16333,13 @@
       </p:sp>
       <p:sp>
         <p:nvSpPr>
-          <p:cNvPr id="11" name="Text 9"/>
-          <p:cNvSpPr/>
-          <p:nvPr/>
-        </p:nvSpPr>
-        <p:spPr>
-          <a:xfrm>
-            <a:off x="822960" y="4416552"/>
+          <p:cNvPr id="13" name="Text 11"/>
+          <p:cNvSpPr/>
+          <p:nvPr/>
+        </p:nvSpPr>
+        <p:spPr>
+          <a:xfrm>
+            <a:off x="822960" y="4709160"/>
             <a:ext cx="3291840" cy="320040"/>
           </a:xfrm>
           <a:prstGeom prst="rect">
@@ -14998,14 +16372,14 @@
       </p:sp>
       <p:sp>
         <p:nvSpPr>
-          <p:cNvPr id="12" name="Text 10"/>
-          <p:cNvSpPr/>
-          <p:nvPr/>
-        </p:nvSpPr>
-        <p:spPr>
-          <a:xfrm>
-            <a:off x="4297680" y="4379976"/>
-            <a:ext cx="7132320" cy="640080"/>
+          <p:cNvPr id="14" name="Text 12"/>
+          <p:cNvSpPr/>
+          <p:nvPr/>
+        </p:nvSpPr>
+        <p:spPr>
+          <a:xfrm>
+            <a:off x="4297680" y="4672584"/>
+            <a:ext cx="7132320" cy="548640"/>
           </a:xfrm>
           <a:prstGeom prst="rect">
             <a:avLst/>
@@ -15040,13 +16414,13 @@
       </p:sp>
       <p:sp>
         <p:nvSpPr>
-          <p:cNvPr id="13" name="Text 11"/>
-          <p:cNvSpPr/>
-          <p:nvPr/>
-        </p:nvSpPr>
-        <p:spPr>
-          <a:xfrm>
-            <a:off x="822960" y="5166360"/>
+          <p:cNvPr id="15" name="Text 13"/>
+          <p:cNvSpPr/>
+          <p:nvPr/>
+        </p:nvSpPr>
+        <p:spPr>
+          <a:xfrm>
+            <a:off x="822960" y="5367528"/>
             <a:ext cx="3291840" cy="320040"/>
           </a:xfrm>
           <a:prstGeom prst="rect">
@@ -15079,14 +16453,14 @@
       </p:sp>
       <p:sp>
         <p:nvSpPr>
-          <p:cNvPr id="14" name="Text 12"/>
-          <p:cNvSpPr/>
-          <p:nvPr/>
-        </p:nvSpPr>
-        <p:spPr>
-          <a:xfrm>
-            <a:off x="4297680" y="5129784"/>
-            <a:ext cx="7132320" cy="640080"/>
+          <p:cNvPr id="16" name="Text 14"/>
+          <p:cNvSpPr/>
+          <p:nvPr/>
+        </p:nvSpPr>
+        <p:spPr>
+          <a:xfrm>
+            <a:off x="4297680" y="5330952"/>
+            <a:ext cx="7132320" cy="548640"/>
           </a:xfrm>
           <a:prstGeom prst="rect">
             <a:avLst/>
@@ -15121,7 +16495,7 @@
       </p:sp>
       <p:sp>
         <p:nvSpPr>
-          <p:cNvPr id="15" name="Text 13"/>
+          <p:cNvPr id="17" name="Text 15"/>
           <p:cNvSpPr/>
           <p:nvPr/>
         </p:nvSpPr>
@@ -15396,7 +16770,7 @@
               <a:buNone/>
             </a:pPr>
             <a:r>
-              <a:rPr lang="en-US" sz="1600" b="1" dirty="0">
+              <a:rPr lang="en-US" sz="1500" b="1" dirty="0">
                 <a:solidFill>
                   <a:srgbClr val="16191D"/>
                 </a:solidFill>
@@ -15410,7 +16784,7 @@
               <a:buNone/>
             </a:pPr>
             <a:r>
-              <a:rPr lang="en-US" sz="1400" dirty="0">
+              <a:rPr lang="en-US" sz="1300" dirty="0">
                 <a:solidFill>
                   <a:srgbClr val="5F6672"/>
                 </a:solidFill>
@@ -15420,7 +16794,7 @@
               </a:rPr>
               <a:t>　で数を表せる</a:t>
             </a:r>
-            <a:endParaRPr lang="en-US" sz="1600" dirty="0"/>
+            <a:endParaRPr lang="en-US" sz="1500" dirty="0"/>
           </a:p>
         </p:txBody>
       </p:sp>
@@ -15432,7 +16806,7 @@
         </p:nvSpPr>
         <p:spPr>
           <a:xfrm>
-            <a:off x="777240" y="2624328"/>
+            <a:off x="777240" y="2496312"/>
             <a:ext cx="457200" cy="457200"/>
           </a:xfrm>
           <a:prstGeom prst="ellipse">
@@ -15457,7 +16831,7 @@
         </p:nvSpPr>
         <p:spPr>
           <a:xfrm>
-            <a:off x="777240" y="2624328"/>
+            <a:off x="777240" y="2496312"/>
             <a:ext cx="457200" cy="457200"/>
           </a:xfrm>
           <a:prstGeom prst="rect">
@@ -15496,7 +16870,7 @@
         </p:nvSpPr>
         <p:spPr>
           <a:xfrm>
-            <a:off x="1417320" y="2642616"/>
+            <a:off x="1417320" y="2514600"/>
             <a:ext cx="9966960" cy="457200"/>
           </a:xfrm>
           <a:prstGeom prst="rect">
@@ -15513,7 +16887,7 @@
               <a:buNone/>
             </a:pPr>
             <a:r>
-              <a:rPr lang="en-US" sz="1600" b="1" dirty="0">
+              <a:rPr lang="en-US" sz="1500" b="1" dirty="0">
                 <a:solidFill>
                   <a:srgbClr val="16191D"/>
                 </a:solidFill>
@@ -15527,7 +16901,7 @@
               <a:buNone/>
             </a:pPr>
             <a:r>
-              <a:rPr lang="en-US" sz="1400" dirty="0">
+              <a:rPr lang="en-US" sz="1300" dirty="0">
                 <a:solidFill>
                   <a:srgbClr val="5F6672"/>
                 </a:solidFill>
@@ -15537,7 +16911,7 @@
               </a:rPr>
               <a:t>　がなぜ誤差を持つか説明できる</a:t>
             </a:r>
-            <a:endParaRPr lang="en-US" sz="1600" dirty="0"/>
+            <a:endParaRPr lang="en-US" sz="1500" dirty="0"/>
           </a:p>
         </p:txBody>
       </p:sp>
@@ -15549,7 +16923,7 @@
         </p:nvSpPr>
         <p:spPr>
           <a:xfrm>
-            <a:off x="777240" y="3483864"/>
+            <a:off x="777240" y="3227832"/>
             <a:ext cx="457200" cy="457200"/>
           </a:xfrm>
           <a:prstGeom prst="ellipse">
@@ -15574,7 +16948,7 @@
         </p:nvSpPr>
         <p:spPr>
           <a:xfrm>
-            <a:off x="777240" y="3483864"/>
+            <a:off x="777240" y="3227832"/>
             <a:ext cx="457200" cy="457200"/>
           </a:xfrm>
           <a:prstGeom prst="rect">
@@ -15613,7 +16987,7 @@
         </p:nvSpPr>
         <p:spPr>
           <a:xfrm>
-            <a:off x="1417320" y="3502152"/>
+            <a:off x="1417320" y="3246120"/>
             <a:ext cx="9966960" cy="457200"/>
           </a:xfrm>
           <a:prstGeom prst="rect">
@@ -15630,7 +17004,7 @@
               <a:buNone/>
             </a:pPr>
             <a:r>
-              <a:rPr lang="en-US" sz="1600" b="1" dirty="0">
+              <a:rPr lang="en-US" sz="1500" b="1" dirty="0">
                 <a:solidFill>
                   <a:srgbClr val="16191D"/>
                 </a:solidFill>
@@ -15644,7 +17018,7 @@
               <a:buNone/>
             </a:pPr>
             <a:r>
-              <a:rPr lang="en-US" sz="1400" dirty="0">
+              <a:rPr lang="en-US" sz="1300" dirty="0">
                 <a:solidFill>
                   <a:srgbClr val="5F6672"/>
                 </a:solidFill>
@@ -15654,7 +17028,7 @@
               </a:rPr>
               <a:t>　の違いを説明し、容量表示のずれを計算できる</a:t>
             </a:r>
-            <a:endParaRPr lang="en-US" sz="1600" dirty="0"/>
+            <a:endParaRPr lang="en-US" sz="1500" dirty="0"/>
           </a:p>
         </p:txBody>
       </p:sp>
@@ -15666,7 +17040,7 @@
         </p:nvSpPr>
         <p:spPr>
           <a:xfrm>
-            <a:off x="777240" y="4343400"/>
+            <a:off x="777240" y="3959352"/>
             <a:ext cx="457200" cy="457200"/>
           </a:xfrm>
           <a:prstGeom prst="ellipse">
@@ -15691,7 +17065,7 @@
         </p:nvSpPr>
         <p:spPr>
           <a:xfrm>
-            <a:off x="777240" y="4343400"/>
+            <a:off x="777240" y="3959352"/>
             <a:ext cx="457200" cy="457200"/>
           </a:xfrm>
           <a:prstGeom prst="rect">
@@ -15730,7 +17104,7 @@
         </p:nvSpPr>
         <p:spPr>
           <a:xfrm>
-            <a:off x="1417320" y="4361688"/>
+            <a:off x="1417320" y="3977640"/>
             <a:ext cx="9966960" cy="457200"/>
           </a:xfrm>
           <a:prstGeom prst="rect">
@@ -15747,7 +17121,7 @@
               <a:buNone/>
             </a:pPr>
             <a:r>
-              <a:rPr lang="en-US" sz="1600" b="1" dirty="0">
+              <a:rPr lang="en-US" sz="1500" b="1" dirty="0">
                 <a:solidFill>
                   <a:srgbClr val="16191D"/>
                 </a:solidFill>
@@ -15761,7 +17135,7 @@
               <a:buNone/>
             </a:pPr>
             <a:r>
-              <a:rPr lang="en-US" sz="1400" dirty="0">
+              <a:rPr lang="en-US" sz="1300" dirty="0">
                 <a:solidFill>
                   <a:srgbClr val="5F6672"/>
                 </a:solidFill>
@@ -15771,7 +17145,7 @@
               </a:rPr>
               <a:t>　で計算量を表し、入力規模に対する伸び方を比較できる</a:t>
             </a:r>
-            <a:endParaRPr lang="en-US" sz="1600" dirty="0"/>
+            <a:endParaRPr lang="en-US" sz="1500" dirty="0"/>
           </a:p>
         </p:txBody>
       </p:sp>
@@ -15783,7 +17157,7 @@
         </p:nvSpPr>
         <p:spPr>
           <a:xfrm>
-            <a:off x="777240" y="5202936"/>
+            <a:off x="777240" y="4690872"/>
             <a:ext cx="457200" cy="457200"/>
           </a:xfrm>
           <a:prstGeom prst="ellipse">
@@ -15808,7 +17182,7 @@
         </p:nvSpPr>
         <p:spPr>
           <a:xfrm>
-            <a:off x="777240" y="5202936"/>
+            <a:off x="777240" y="4690872"/>
             <a:ext cx="457200" cy="457200"/>
           </a:xfrm>
           <a:prstGeom prst="rect">
@@ -15847,7 +17221,7 @@
         </p:nvSpPr>
         <p:spPr>
           <a:xfrm>
-            <a:off x="1417320" y="5221224"/>
+            <a:off x="1417320" y="4709160"/>
             <a:ext cx="9966960" cy="457200"/>
           </a:xfrm>
           <a:prstGeom prst="rect">
@@ -15864,7 +17238,7 @@
               <a:buNone/>
             </a:pPr>
             <a:r>
-              <a:rPr lang="en-US" sz="1600" b="1" dirty="0">
+              <a:rPr lang="en-US" sz="1500" b="1" dirty="0">
                 <a:solidFill>
                   <a:srgbClr val="16191D"/>
                 </a:solidFill>
@@ -15878,7 +17252,7 @@
               <a:buNone/>
             </a:pPr>
             <a:r>
-              <a:rPr lang="en-US" sz="1400" dirty="0">
+              <a:rPr lang="en-US" sz="1300" dirty="0">
                 <a:solidFill>
                   <a:srgbClr val="5F6672"/>
                 </a:solidFill>
@@ -15888,7 +17262,124 @@
               </a:rPr>
               <a:t>　の区別、NP完全性の意味を説明できる</a:t>
             </a:r>
-            <a:endParaRPr lang="en-US" sz="1600" dirty="0"/>
+            <a:endParaRPr lang="en-US" sz="1500" dirty="0"/>
+          </a:p>
+        </p:txBody>
+      </p:sp>
+      <p:sp>
+        <p:nvSpPr>
+          <p:cNvPr id="20" name="Shape 18"/>
+          <p:cNvSpPr/>
+          <p:nvPr/>
+        </p:nvSpPr>
+        <p:spPr>
+          <a:xfrm>
+            <a:off x="777240" y="5422392"/>
+            <a:ext cx="457200" cy="457200"/>
+          </a:xfrm>
+          <a:prstGeom prst="ellipse">
+            <a:avLst/>
+          </a:prstGeom>
+          <a:solidFill>
+            <a:srgbClr val="D9E6F4"/>
+          </a:solidFill>
+          <a:ln w="15240">
+            <a:solidFill>
+              <a:srgbClr val="0B5CAD"/>
+            </a:solidFill>
+            <a:prstDash val="solid"/>
+          </a:ln>
+        </p:spPr>
+      </p:sp>
+      <p:sp>
+        <p:nvSpPr>
+          <p:cNvPr id="21" name="Text 19"/>
+          <p:cNvSpPr/>
+          <p:nvPr/>
+        </p:nvSpPr>
+        <p:spPr>
+          <a:xfrm>
+            <a:off x="777240" y="5422392"/>
+            <a:ext cx="457200" cy="457200"/>
+          </a:xfrm>
+          <a:prstGeom prst="rect">
+            <a:avLst/>
+          </a:prstGeom>
+          <a:noFill/>
+          <a:ln/>
+        </p:spPr>
+        <p:txBody>
+          <a:bodyPr wrap="square" lIns="0" tIns="0" rIns="0" bIns="0" rtlCol="0" anchor="ctr"/>
+          <a:lstStyle/>
+          <a:p>
+            <a:pPr algn="ctr" indent="0" marL="0">
+              <a:buNone/>
+            </a:pPr>
+            <a:r>
+              <a:rPr lang="en-US" sz="1400" b="1" dirty="0">
+                <a:solidFill>
+                  <a:srgbClr val="0B5CAD"/>
+                </a:solidFill>
+                <a:latin typeface="Yu Gothic" pitchFamily="34" charset="0"/>
+                <a:ea typeface="Yu Gothic" pitchFamily="34" charset="-122"/>
+                <a:cs typeface="Yu Gothic" pitchFamily="34" charset="-120"/>
+              </a:rPr>
+              <a:t>6</a:t>
+            </a:r>
+            <a:endParaRPr lang="en-US" sz="1400" dirty="0"/>
+          </a:p>
+        </p:txBody>
+      </p:sp>
+      <p:sp>
+        <p:nvSpPr>
+          <p:cNvPr id="22" name="Text 20"/>
+          <p:cNvSpPr/>
+          <p:nvPr/>
+        </p:nvSpPr>
+        <p:spPr>
+          <a:xfrm>
+            <a:off x="1417320" y="5440680"/>
+            <a:ext cx="9966960" cy="457200"/>
+          </a:xfrm>
+          <a:prstGeom prst="rect">
+            <a:avLst/>
+          </a:prstGeom>
+          <a:noFill/>
+          <a:ln/>
+        </p:spPr>
+        <p:txBody>
+          <a:bodyPr wrap="square" lIns="0" tIns="0" rIns="0" bIns="0" rtlCol="0" anchor="ctr"/>
+          <a:lstStyle/>
+          <a:p>
+            <a:pPr indent="0" marL="0">
+              <a:buNone/>
+            </a:pPr>
+            <a:r>
+              <a:rPr lang="en-US" sz="1500" b="1" dirty="0">
+                <a:solidFill>
+                  <a:srgbClr val="16191D"/>
+                </a:solidFill>
+                <a:latin typeface="Yu Gothic" pitchFamily="34" charset="0"/>
+                <a:ea typeface="Yu Gothic" pitchFamily="34" charset="-122"/>
+                <a:cs typeface="Yu Gothic" pitchFamily="34" charset="-120"/>
+              </a:rPr>
+              <a:t>量子計算機</a:t>
+            </a:r>
+            <a:pPr indent="0" marL="0">
+              <a:buNone/>
+            </a:pPr>
+            <a:r>
+              <a:rPr lang="en-US" sz="1300" dirty="0">
+                <a:solidFill>
+                  <a:srgbClr val="5F6672"/>
+                </a:solidFill>
+                <a:latin typeface="Yu Gothic" pitchFamily="34" charset="0"/>
+                <a:ea typeface="Yu Gothic" pitchFamily="34" charset="-122"/>
+                <a:cs typeface="Yu Gothic" pitchFamily="34" charset="-120"/>
+              </a:rPr>
+              <a:t>　が計算量のクラスをどう変え、何を変えないかを説明できる</a:t>
+            </a:r>
+            <a:endParaRPr lang="en-US" sz="1500" dirty="0"/>
           </a:p>
         </p:txBody>
       </p:sp>
@@ -20124,7 +21615,7 @@
         <p:spPr>
           <a:xfrm>
             <a:off x="685800" y="1481328"/>
-            <a:ext cx="10789920" cy="621792"/>
+            <a:ext cx="10789920" cy="365760"/>
           </a:xfrm>
           <a:prstGeom prst="rect">
             <a:avLst/>
@@ -20165,7 +21656,7 @@
         </p:nvSpPr>
         <p:spPr>
           <a:xfrm>
-            <a:off x="685800" y="2139696"/>
+            <a:off x="685800" y="1883664"/>
             <a:ext cx="5166360" cy="292608"/>
           </a:xfrm>
           <a:prstGeom prst="rect">
@@ -20211,7 +21702,7 @@
           </p:nvPr>
         </p:nvGraphicFramePr>
         <p:xfrm>
-          <a:off x="685800" y="2542032"/>
+          <a:off x="685800" y="2286000"/>
           <a:ext cx="5166360" cy="914400"/>
         </p:xfrm>
         <a:graphic>
@@ -21062,7 +22553,7 @@
         </p:nvSpPr>
         <p:spPr>
           <a:xfrm>
-            <a:off x="6309360" y="2139696"/>
+            <a:off x="6309360" y="1883664"/>
             <a:ext cx="5166360" cy="292608"/>
           </a:xfrm>
           <a:prstGeom prst="rect">
@@ -21101,7 +22592,7 @@
         </p:nvSpPr>
         <p:spPr>
           <a:xfrm>
-            <a:off x="6309360" y="2542032"/>
+            <a:off x="6309360" y="2286000"/>
             <a:ext cx="5166360" cy="1554480"/>
           </a:xfrm>
           <a:prstGeom prst="rect">
@@ -21192,7 +22683,7 @@
         </p:nvSpPr>
         <p:spPr>
           <a:xfrm>
-            <a:off x="6309360" y="4169664"/>
+            <a:off x="6309360" y="3913632"/>
             <a:ext cx="5166360" cy="320040"/>
           </a:xfrm>
           <a:prstGeom prst="rect">

--- a/slides/第02回_情報の表現と計算量.pptx
+++ b/slides/第02回_情報の表現と計算量.pptx
@@ -15699,7 +15699,7 @@
                 <a:ea typeface="Courier New" pitchFamily="34" charset="-122"/>
                 <a:cs typeface="Courier New" pitchFamily="34" charset="-120"/>
               </a:rPr>
-              <a:t>2-3</a:t>
+              <a:t>2-4</a:t>
             </a:r>
             <a:endParaRPr lang="en-US" sz="1300" dirty="0"/>
           </a:p>
@@ -15807,7 +15807,7 @@
                 <a:ea typeface="Courier New" pitchFamily="34" charset="-122"/>
                 <a:cs typeface="Courier New" pitchFamily="34" charset="-120"/>
               </a:rPr>
-              <a:t>2-4</a:t>
+              <a:t>2-5</a:t>
             </a:r>
             <a:endParaRPr lang="en-US" sz="1300" dirty="0"/>
           </a:p>

--- a/slides/第02回_情報の表現と計算量.pptx
+++ b/slides/第02回_情報の表現と計算量.pptx
@@ -15849,7 +15849,7 @@
                 <a:ea typeface="Yu Gothic" pitchFamily="34" charset="-122"/>
                 <a:cs typeface="Yu Gothic" pitchFamily="34" charset="-120"/>
               </a:rPr>
-              <a:t>次のうち NP完全と知られているものはどれか。(a) 配列のソート (b) 数独（n×n に一般化） (c) 二分探索 (d) グラフの最短経路</a:t>
+              <a:t>NP完全なのは (b) 数独（n×n に一般化）である。残る3つ — (a) 配列のソート (c) 二分探索 (d) グラフの最短経路 — が NP完全でない理由を、それぞれ「n に対してどのくらいの時間で解けるか」に触れて述べよ。</a:t>
             </a:r>
             <a:endParaRPr lang="en-US" sz="1400" dirty="0"/>
           </a:p>
